--- a/7th Semester/CCE-411_Algorithm Engineering/Algo Mid murad sir part/heuristic algorithm 4-8-26.pptx
+++ b/7th Semester/CCE-411_Algorithm Engineering/Algo Mid murad sir part/heuristic algorithm 4-8-26.pptx
@@ -1,39 +1,39 @@
 
 <file path=ppt/presentation.xml><?xml version="1.0" encoding="utf-8"?>
-<p:presentation xmlns:a="http://schemas.openxmlformats.org/drawingml/2006/main" xmlns:r="http://schemas.openxmlformats.org/officeDocument/2006/relationships" xmlns:p="http://schemas.openxmlformats.org/presentationml/2006/main" strictFirstAndLastChars="0" saveSubsetFonts="1" autoCompressPictures="0">
+<p:presentation xmlns:a="http://schemas.openxmlformats.org/drawingml/2006/main" xmlns:r="http://schemas.openxmlformats.org/officeDocument/2006/relationships" xmlns:p="http://schemas.openxmlformats.org/presentationml/2006/main" strictFirstAndLastChars="0" autoCompressPictures="0">
   <p:sldMasterIdLst>
     <p:sldMasterId id="2147483648" r:id="rId1"/>
   </p:sldMasterIdLst>
   <p:notesMasterIdLst>
-    <p:notesMasterId r:id="rId28"/>
+    <p:notesMasterId r:id="rId4"/>
   </p:notesMasterIdLst>
   <p:sldIdLst>
-    <p:sldId id="256" r:id="rId2"/>
-    <p:sldId id="278" r:id="rId3"/>
-    <p:sldId id="279" r:id="rId4"/>
-    <p:sldId id="280" r:id="rId5"/>
-    <p:sldId id="281" r:id="rId6"/>
-    <p:sldId id="282" r:id="rId7"/>
-    <p:sldId id="283" r:id="rId8"/>
-    <p:sldId id="284" r:id="rId9"/>
-    <p:sldId id="268" r:id="rId10"/>
-    <p:sldId id="259" r:id="rId11"/>
-    <p:sldId id="289" r:id="rId12"/>
-    <p:sldId id="290" r:id="rId13"/>
-    <p:sldId id="291" r:id="rId14"/>
-    <p:sldId id="292" r:id="rId15"/>
-    <p:sldId id="263" r:id="rId16"/>
-    <p:sldId id="273" r:id="rId17"/>
-    <p:sldId id="274" r:id="rId18"/>
-    <p:sldId id="264" r:id="rId19"/>
-    <p:sldId id="265" r:id="rId20"/>
-    <p:sldId id="275" r:id="rId21"/>
-    <p:sldId id="276" r:id="rId22"/>
-    <p:sldId id="286" r:id="rId23"/>
-    <p:sldId id="287" r:id="rId24"/>
-    <p:sldId id="288" r:id="rId25"/>
-    <p:sldId id="285" r:id="rId26"/>
-    <p:sldId id="277" r:id="rId27"/>
+    <p:sldId id="256" r:id="rId3"/>
+    <p:sldId id="278" r:id="rId5"/>
+    <p:sldId id="279" r:id="rId6"/>
+    <p:sldId id="280" r:id="rId7"/>
+    <p:sldId id="281" r:id="rId8"/>
+    <p:sldId id="282" r:id="rId9"/>
+    <p:sldId id="283" r:id="rId10"/>
+    <p:sldId id="284" r:id="rId11"/>
+    <p:sldId id="268" r:id="rId12"/>
+    <p:sldId id="259" r:id="rId13"/>
+    <p:sldId id="289" r:id="rId14"/>
+    <p:sldId id="290" r:id="rId15"/>
+    <p:sldId id="291" r:id="rId16"/>
+    <p:sldId id="292" r:id="rId17"/>
+    <p:sldId id="263" r:id="rId18"/>
+    <p:sldId id="273" r:id="rId19"/>
+    <p:sldId id="274" r:id="rId20"/>
+    <p:sldId id="264" r:id="rId21"/>
+    <p:sldId id="265" r:id="rId22"/>
+    <p:sldId id="275" r:id="rId23"/>
+    <p:sldId id="276" r:id="rId24"/>
+    <p:sldId id="286" r:id="rId25"/>
+    <p:sldId id="287" r:id="rId26"/>
+    <p:sldId id="288" r:id="rId27"/>
+    <p:sldId id="285" r:id="rId28"/>
+    <p:sldId id="277" r:id="rId29"/>
   </p:sldIdLst>
   <p:sldSz cx="12192000" cy="6858000"/>
   <p:notesSz cx="6858000" cy="9144000"/>
@@ -62,15 +62,15 @@
       <a:buClr>
         <a:srgbClr val="000000"/>
       </a:buClr>
-      <a:buFont typeface="Arial"/>
+      <a:buFont typeface="Arial" panose="020B0604020202020204"/>
       <a:defRPr sz="1400" b="0" i="0" u="none" strike="noStrike" cap="none">
         <a:solidFill>
           <a:srgbClr val="000000"/>
         </a:solidFill>
-        <a:latin typeface="Arial"/>
-        <a:ea typeface="Arial"/>
-        <a:cs typeface="Arial"/>
-        <a:sym typeface="Arial"/>
+        <a:latin typeface="Arial" panose="020B0604020202020204"/>
+        <a:ea typeface="Arial" panose="020B0604020202020204"/>
+        <a:cs typeface="Arial" panose="020B0604020202020204"/>
+        <a:sym typeface="Arial" panose="020B0604020202020204"/>
       </a:defRPr>
     </a:lvl1pPr>
     <a:lvl2pPr marR="0" lvl="1" algn="l" rtl="0">
@@ -86,15 +86,15 @@
       <a:buClr>
         <a:srgbClr val="000000"/>
       </a:buClr>
-      <a:buFont typeface="Arial"/>
+      <a:buFont typeface="Arial" panose="020B0604020202020204"/>
       <a:defRPr sz="1400" b="0" i="0" u="none" strike="noStrike" cap="none">
         <a:solidFill>
           <a:srgbClr val="000000"/>
         </a:solidFill>
-        <a:latin typeface="Arial"/>
-        <a:ea typeface="Arial"/>
-        <a:cs typeface="Arial"/>
-        <a:sym typeface="Arial"/>
+        <a:latin typeface="Arial" panose="020B0604020202020204"/>
+        <a:ea typeface="Arial" panose="020B0604020202020204"/>
+        <a:cs typeface="Arial" panose="020B0604020202020204"/>
+        <a:sym typeface="Arial" panose="020B0604020202020204"/>
       </a:defRPr>
     </a:lvl2pPr>
     <a:lvl3pPr marR="0" lvl="2" algn="l" rtl="0">
@@ -110,15 +110,15 @@
       <a:buClr>
         <a:srgbClr val="000000"/>
       </a:buClr>
-      <a:buFont typeface="Arial"/>
+      <a:buFont typeface="Arial" panose="020B0604020202020204"/>
       <a:defRPr sz="1400" b="0" i="0" u="none" strike="noStrike" cap="none">
         <a:solidFill>
           <a:srgbClr val="000000"/>
         </a:solidFill>
-        <a:latin typeface="Arial"/>
-        <a:ea typeface="Arial"/>
-        <a:cs typeface="Arial"/>
-        <a:sym typeface="Arial"/>
+        <a:latin typeface="Arial" panose="020B0604020202020204"/>
+        <a:ea typeface="Arial" panose="020B0604020202020204"/>
+        <a:cs typeface="Arial" panose="020B0604020202020204"/>
+        <a:sym typeface="Arial" panose="020B0604020202020204"/>
       </a:defRPr>
     </a:lvl3pPr>
     <a:lvl4pPr marR="0" lvl="3" algn="l" rtl="0">
@@ -134,15 +134,15 @@
       <a:buClr>
         <a:srgbClr val="000000"/>
       </a:buClr>
-      <a:buFont typeface="Arial"/>
+      <a:buFont typeface="Arial" panose="020B0604020202020204"/>
       <a:defRPr sz="1400" b="0" i="0" u="none" strike="noStrike" cap="none">
         <a:solidFill>
           <a:srgbClr val="000000"/>
         </a:solidFill>
-        <a:latin typeface="Arial"/>
-        <a:ea typeface="Arial"/>
-        <a:cs typeface="Arial"/>
-        <a:sym typeface="Arial"/>
+        <a:latin typeface="Arial" panose="020B0604020202020204"/>
+        <a:ea typeface="Arial" panose="020B0604020202020204"/>
+        <a:cs typeface="Arial" panose="020B0604020202020204"/>
+        <a:sym typeface="Arial" panose="020B0604020202020204"/>
       </a:defRPr>
     </a:lvl4pPr>
     <a:lvl5pPr marR="0" lvl="4" algn="l" rtl="0">
@@ -158,15 +158,15 @@
       <a:buClr>
         <a:srgbClr val="000000"/>
       </a:buClr>
-      <a:buFont typeface="Arial"/>
+      <a:buFont typeface="Arial" panose="020B0604020202020204"/>
       <a:defRPr sz="1400" b="0" i="0" u="none" strike="noStrike" cap="none">
         <a:solidFill>
           <a:srgbClr val="000000"/>
         </a:solidFill>
-        <a:latin typeface="Arial"/>
-        <a:ea typeface="Arial"/>
-        <a:cs typeface="Arial"/>
-        <a:sym typeface="Arial"/>
+        <a:latin typeface="Arial" panose="020B0604020202020204"/>
+        <a:ea typeface="Arial" panose="020B0604020202020204"/>
+        <a:cs typeface="Arial" panose="020B0604020202020204"/>
+        <a:sym typeface="Arial" panose="020B0604020202020204"/>
       </a:defRPr>
     </a:lvl5pPr>
     <a:lvl6pPr marR="0" lvl="5" algn="l" rtl="0">
@@ -182,15 +182,15 @@
       <a:buClr>
         <a:srgbClr val="000000"/>
       </a:buClr>
-      <a:buFont typeface="Arial"/>
+      <a:buFont typeface="Arial" panose="020B0604020202020204"/>
       <a:defRPr sz="1400" b="0" i="0" u="none" strike="noStrike" cap="none">
         <a:solidFill>
           <a:srgbClr val="000000"/>
         </a:solidFill>
-        <a:latin typeface="Arial"/>
-        <a:ea typeface="Arial"/>
-        <a:cs typeface="Arial"/>
-        <a:sym typeface="Arial"/>
+        <a:latin typeface="Arial" panose="020B0604020202020204"/>
+        <a:ea typeface="Arial" panose="020B0604020202020204"/>
+        <a:cs typeface="Arial" panose="020B0604020202020204"/>
+        <a:sym typeface="Arial" panose="020B0604020202020204"/>
       </a:defRPr>
     </a:lvl6pPr>
     <a:lvl7pPr marR="0" lvl="6" algn="l" rtl="0">
@@ -206,15 +206,15 @@
       <a:buClr>
         <a:srgbClr val="000000"/>
       </a:buClr>
-      <a:buFont typeface="Arial"/>
+      <a:buFont typeface="Arial" panose="020B0604020202020204"/>
       <a:defRPr sz="1400" b="0" i="0" u="none" strike="noStrike" cap="none">
         <a:solidFill>
           <a:srgbClr val="000000"/>
         </a:solidFill>
-        <a:latin typeface="Arial"/>
-        <a:ea typeface="Arial"/>
-        <a:cs typeface="Arial"/>
-        <a:sym typeface="Arial"/>
+        <a:latin typeface="Arial" panose="020B0604020202020204"/>
+        <a:ea typeface="Arial" panose="020B0604020202020204"/>
+        <a:cs typeface="Arial" panose="020B0604020202020204"/>
+        <a:sym typeface="Arial" panose="020B0604020202020204"/>
       </a:defRPr>
     </a:lvl7pPr>
     <a:lvl8pPr marR="0" lvl="7" algn="l" rtl="0">
@@ -230,15 +230,15 @@
       <a:buClr>
         <a:srgbClr val="000000"/>
       </a:buClr>
-      <a:buFont typeface="Arial"/>
+      <a:buFont typeface="Arial" panose="020B0604020202020204"/>
       <a:defRPr sz="1400" b="0" i="0" u="none" strike="noStrike" cap="none">
         <a:solidFill>
           <a:srgbClr val="000000"/>
         </a:solidFill>
-        <a:latin typeface="Arial"/>
-        <a:ea typeface="Arial"/>
-        <a:cs typeface="Arial"/>
-        <a:sym typeface="Arial"/>
+        <a:latin typeface="Arial" panose="020B0604020202020204"/>
+        <a:ea typeface="Arial" panose="020B0604020202020204"/>
+        <a:cs typeface="Arial" panose="020B0604020202020204"/>
+        <a:sym typeface="Arial" panose="020B0604020202020204"/>
       </a:defRPr>
     </a:lvl8pPr>
     <a:lvl9pPr marR="0" lvl="8" algn="l" rtl="0">
@@ -254,35 +254,32 @@
       <a:buClr>
         <a:srgbClr val="000000"/>
       </a:buClr>
-      <a:buFont typeface="Arial"/>
+      <a:buFont typeface="Arial" panose="020B0604020202020204"/>
       <a:defRPr sz="1400" b="0" i="0" u="none" strike="noStrike" cap="none">
         <a:solidFill>
           <a:srgbClr val="000000"/>
         </a:solidFill>
-        <a:latin typeface="Arial"/>
-        <a:ea typeface="Arial"/>
-        <a:cs typeface="Arial"/>
-        <a:sym typeface="Arial"/>
+        <a:latin typeface="Arial" panose="020B0604020202020204"/>
+        <a:ea typeface="Arial" panose="020B0604020202020204"/>
+        <a:cs typeface="Arial" panose="020B0604020202020204"/>
+        <a:sym typeface="Arial" panose="020B0604020202020204"/>
       </a:defRPr>
     </a:lvl9pPr>
   </p:defaultTextStyle>
   <p:extLst>
     <p:ext uri="{EFAFB233-063F-42B5-8137-9DF3F51BA10A}">
       <p15:sldGuideLst xmlns:p15="http://schemas.microsoft.com/office/powerpoint/2012/main">
-        <p15:guide id="1" orient="horz" pos="2160">
+        <p15:guide id="1" orient="horz" pos="2160" userDrawn="1">
           <p15:clr>
             <a:srgbClr val="A4A3A4"/>
           </p15:clr>
         </p15:guide>
-        <p15:guide id="2" pos="3840">
+        <p15:guide id="2" pos="3840" userDrawn="1">
           <p15:clr>
             <a:srgbClr val="A4A3A4"/>
           </p15:clr>
         </p15:guide>
       </p15:sldGuideLst>
-    </p:ext>
-    <p:ext uri="GoogleSlidesCustomDataVersion2">
-      <go:slidesCustomData xmlns:go="http://customooxmlschemas.google.com/" xmlns:ahyp="http://schemas.microsoft.com/office/drawing/2018/hyperlinkcolor" xmlns:p15="http://schemas.microsoft.com/office/powerpoint/2012/main" xmlns:p14="http://schemas.microsoft.com/office/powerpoint/2010/main" xmlns:com="http://schemas.openxmlformats.org/drawingml/2006/compatibility" xmlns:pvml="urn:schemas-microsoft-com:office:powerpoint" xmlns:v="urn:schemas-microsoft-com:vml" xmlns:o="urn:schemas-microsoft-com:office:office" xmlns:dgm="http://schemas.openxmlformats.org/drawingml/2006/diagram" xmlns:c="http://schemas.openxmlformats.org/drawingml/2006/chart" xmlns:mv="urn:schemas-microsoft-com:mac:vml" xmlns:mc="http://schemas.openxmlformats.org/markup-compatibility/2006" xmlns="" r:id="rId29" roundtripDataSignature="AMtx7miA42qLb3/vQfTkaRMijrD8wJt8hQ=="/>
     </p:ext>
   </p:extLst>
 </p:presentation>
@@ -489,9 +486,7 @@
               <a:defRPr sz="1100"/>
             </a:lvl9pPr>
           </a:lstStyle>
-          <a:p>
-            <a:endParaRPr/>
-          </a:p>
+          <a:p/>
         </p:txBody>
       </p:sp>
     </p:spTree>
@@ -522,15 +517,15 @@
       <a:buClr>
         <a:srgbClr val="000000"/>
       </a:buClr>
-      <a:buFont typeface="Arial"/>
+      <a:buFont typeface="Arial" panose="020B0604020202020204"/>
       <a:defRPr sz="1400" b="0" i="0" u="none" strike="noStrike" cap="none">
         <a:solidFill>
           <a:srgbClr val="000000"/>
         </a:solidFill>
-        <a:latin typeface="Arial"/>
-        <a:ea typeface="Arial"/>
-        <a:cs typeface="Arial"/>
-        <a:sym typeface="Arial"/>
+        <a:latin typeface="Arial" panose="020B0604020202020204"/>
+        <a:ea typeface="Arial" panose="020B0604020202020204"/>
+        <a:cs typeface="Arial" panose="020B0604020202020204"/>
+        <a:sym typeface="Arial" panose="020B0604020202020204"/>
       </a:defRPr>
     </a:lvl1pPr>
     <a:lvl2pPr marR="0" lvl="1" algn="l" rtl="0">
@@ -546,15 +541,15 @@
       <a:buClr>
         <a:srgbClr val="000000"/>
       </a:buClr>
-      <a:buFont typeface="Arial"/>
+      <a:buFont typeface="Arial" panose="020B0604020202020204"/>
       <a:defRPr sz="1400" b="0" i="0" u="none" strike="noStrike" cap="none">
         <a:solidFill>
           <a:srgbClr val="000000"/>
         </a:solidFill>
-        <a:latin typeface="Arial"/>
-        <a:ea typeface="Arial"/>
-        <a:cs typeface="Arial"/>
-        <a:sym typeface="Arial"/>
+        <a:latin typeface="Arial" panose="020B0604020202020204"/>
+        <a:ea typeface="Arial" panose="020B0604020202020204"/>
+        <a:cs typeface="Arial" panose="020B0604020202020204"/>
+        <a:sym typeface="Arial" panose="020B0604020202020204"/>
       </a:defRPr>
     </a:lvl2pPr>
     <a:lvl3pPr marR="0" lvl="2" algn="l" rtl="0">
@@ -570,15 +565,15 @@
       <a:buClr>
         <a:srgbClr val="000000"/>
       </a:buClr>
-      <a:buFont typeface="Arial"/>
+      <a:buFont typeface="Arial" panose="020B0604020202020204"/>
       <a:defRPr sz="1400" b="0" i="0" u="none" strike="noStrike" cap="none">
         <a:solidFill>
           <a:srgbClr val="000000"/>
         </a:solidFill>
-        <a:latin typeface="Arial"/>
-        <a:ea typeface="Arial"/>
-        <a:cs typeface="Arial"/>
-        <a:sym typeface="Arial"/>
+        <a:latin typeface="Arial" panose="020B0604020202020204"/>
+        <a:ea typeface="Arial" panose="020B0604020202020204"/>
+        <a:cs typeface="Arial" panose="020B0604020202020204"/>
+        <a:sym typeface="Arial" panose="020B0604020202020204"/>
       </a:defRPr>
     </a:lvl3pPr>
     <a:lvl4pPr marR="0" lvl="3" algn="l" rtl="0">
@@ -594,15 +589,15 @@
       <a:buClr>
         <a:srgbClr val="000000"/>
       </a:buClr>
-      <a:buFont typeface="Arial"/>
+      <a:buFont typeface="Arial" panose="020B0604020202020204"/>
       <a:defRPr sz="1400" b="0" i="0" u="none" strike="noStrike" cap="none">
         <a:solidFill>
           <a:srgbClr val="000000"/>
         </a:solidFill>
-        <a:latin typeface="Arial"/>
-        <a:ea typeface="Arial"/>
-        <a:cs typeface="Arial"/>
-        <a:sym typeface="Arial"/>
+        <a:latin typeface="Arial" panose="020B0604020202020204"/>
+        <a:ea typeface="Arial" panose="020B0604020202020204"/>
+        <a:cs typeface="Arial" panose="020B0604020202020204"/>
+        <a:sym typeface="Arial" panose="020B0604020202020204"/>
       </a:defRPr>
     </a:lvl4pPr>
     <a:lvl5pPr marR="0" lvl="4" algn="l" rtl="0">
@@ -618,15 +613,15 @@
       <a:buClr>
         <a:srgbClr val="000000"/>
       </a:buClr>
-      <a:buFont typeface="Arial"/>
+      <a:buFont typeface="Arial" panose="020B0604020202020204"/>
       <a:defRPr sz="1400" b="0" i="0" u="none" strike="noStrike" cap="none">
         <a:solidFill>
           <a:srgbClr val="000000"/>
         </a:solidFill>
-        <a:latin typeface="Arial"/>
-        <a:ea typeface="Arial"/>
-        <a:cs typeface="Arial"/>
-        <a:sym typeface="Arial"/>
+        <a:latin typeface="Arial" panose="020B0604020202020204"/>
+        <a:ea typeface="Arial" panose="020B0604020202020204"/>
+        <a:cs typeface="Arial" panose="020B0604020202020204"/>
+        <a:sym typeface="Arial" panose="020B0604020202020204"/>
       </a:defRPr>
     </a:lvl5pPr>
     <a:lvl6pPr marR="0" lvl="5" algn="l" rtl="0">
@@ -642,15 +637,15 @@
       <a:buClr>
         <a:srgbClr val="000000"/>
       </a:buClr>
-      <a:buFont typeface="Arial"/>
+      <a:buFont typeface="Arial" panose="020B0604020202020204"/>
       <a:defRPr sz="1400" b="0" i="0" u="none" strike="noStrike" cap="none">
         <a:solidFill>
           <a:srgbClr val="000000"/>
         </a:solidFill>
-        <a:latin typeface="Arial"/>
-        <a:ea typeface="Arial"/>
-        <a:cs typeface="Arial"/>
-        <a:sym typeface="Arial"/>
+        <a:latin typeface="Arial" panose="020B0604020202020204"/>
+        <a:ea typeface="Arial" panose="020B0604020202020204"/>
+        <a:cs typeface="Arial" panose="020B0604020202020204"/>
+        <a:sym typeface="Arial" panose="020B0604020202020204"/>
       </a:defRPr>
     </a:lvl6pPr>
     <a:lvl7pPr marR="0" lvl="6" algn="l" rtl="0">
@@ -666,15 +661,15 @@
       <a:buClr>
         <a:srgbClr val="000000"/>
       </a:buClr>
-      <a:buFont typeface="Arial"/>
+      <a:buFont typeface="Arial" panose="020B0604020202020204"/>
       <a:defRPr sz="1400" b="0" i="0" u="none" strike="noStrike" cap="none">
         <a:solidFill>
           <a:srgbClr val="000000"/>
         </a:solidFill>
-        <a:latin typeface="Arial"/>
-        <a:ea typeface="Arial"/>
-        <a:cs typeface="Arial"/>
-        <a:sym typeface="Arial"/>
+        <a:latin typeface="Arial" panose="020B0604020202020204"/>
+        <a:ea typeface="Arial" panose="020B0604020202020204"/>
+        <a:cs typeface="Arial" panose="020B0604020202020204"/>
+        <a:sym typeface="Arial" panose="020B0604020202020204"/>
       </a:defRPr>
     </a:lvl7pPr>
     <a:lvl8pPr marR="0" lvl="7" algn="l" rtl="0">
@@ -690,15 +685,15 @@
       <a:buClr>
         <a:srgbClr val="000000"/>
       </a:buClr>
-      <a:buFont typeface="Arial"/>
+      <a:buFont typeface="Arial" panose="020B0604020202020204"/>
       <a:defRPr sz="1400" b="0" i="0" u="none" strike="noStrike" cap="none">
         <a:solidFill>
           <a:srgbClr val="000000"/>
         </a:solidFill>
-        <a:latin typeface="Arial"/>
-        <a:ea typeface="Arial"/>
-        <a:cs typeface="Arial"/>
-        <a:sym typeface="Arial"/>
+        <a:latin typeface="Arial" panose="020B0604020202020204"/>
+        <a:ea typeface="Arial" panose="020B0604020202020204"/>
+        <a:cs typeface="Arial" panose="020B0604020202020204"/>
+        <a:sym typeface="Arial" panose="020B0604020202020204"/>
       </a:defRPr>
     </a:lvl8pPr>
     <a:lvl9pPr marR="0" lvl="8" algn="l" rtl="0">
@@ -714,15 +709,15 @@
       <a:buClr>
         <a:srgbClr val="000000"/>
       </a:buClr>
-      <a:buFont typeface="Arial"/>
+      <a:buFont typeface="Arial" panose="020B0604020202020204"/>
       <a:defRPr sz="1400" b="0" i="0" u="none" strike="noStrike" cap="none">
         <a:solidFill>
           <a:srgbClr val="000000"/>
         </a:solidFill>
-        <a:latin typeface="Arial"/>
-        <a:ea typeface="Arial"/>
-        <a:cs typeface="Arial"/>
-        <a:sym typeface="Arial"/>
+        <a:latin typeface="Arial" panose="020B0604020202020204"/>
+        <a:ea typeface="Arial" panose="020B0604020202020204"/>
+        <a:cs typeface="Arial" panose="020B0604020202020204"/>
+        <a:sym typeface="Arial" panose="020B0604020202020204"/>
       </a:defRPr>
     </a:lvl9pPr>
   </p:notesStyle>
@@ -730,7 +725,7 @@
 </file>
 
 <file path=ppt/notesSlides/notesSlide1.xml><?xml version="1.0" encoding="utf-8"?>
-<p:notes xmlns:a="http://schemas.openxmlformats.org/drawingml/2006/main" xmlns:r="http://schemas.openxmlformats.org/officeDocument/2006/relationships" xmlns:p="http://schemas.openxmlformats.org/presentationml/2006/main" showMasterSp="0" showMasterPhAnim="0">
+<p:notes xmlns:a="http://schemas.openxmlformats.org/drawingml/2006/main" xmlns:r="http://schemas.openxmlformats.org/officeDocument/2006/relationships" xmlns:p="http://schemas.openxmlformats.org/presentationml/2006/main" showMasterPhAnim="0" showMasterSp="0">
   <p:cSld>
     <p:spTree>
       <p:nvGrpSpPr>
@@ -780,7 +775,6 @@
               </a:spcAft>
               <a:buNone/>
             </a:pPr>
-            <a:endParaRPr/>
           </a:p>
         </p:txBody>
       </p:sp>
@@ -834,7 +828,7 @@
 </file>
 
 <file path=ppt/notesSlides/notesSlide2.xml><?xml version="1.0" encoding="utf-8"?>
-<p:notes xmlns:a="http://schemas.openxmlformats.org/drawingml/2006/main" xmlns:r="http://schemas.openxmlformats.org/officeDocument/2006/relationships" xmlns:p="http://schemas.openxmlformats.org/presentationml/2006/main" showMasterSp="0" showMasterPhAnim="0">
+<p:notes xmlns:a="http://schemas.openxmlformats.org/drawingml/2006/main" xmlns:r="http://schemas.openxmlformats.org/officeDocument/2006/relationships" xmlns:p="http://schemas.openxmlformats.org/presentationml/2006/main" showMasterPhAnim="0" showMasterSp="0">
   <p:cSld>
     <p:spTree>
       <p:nvGrpSpPr>
@@ -884,7 +878,6 @@
               </a:spcAft>
               <a:buNone/>
             </a:pPr>
-            <a:endParaRPr/>
           </a:p>
         </p:txBody>
       </p:sp>
@@ -938,7 +931,7 @@
 </file>
 
 <file path=ppt/notesSlides/notesSlide3.xml><?xml version="1.0" encoding="utf-8"?>
-<p:notes xmlns:a="http://schemas.openxmlformats.org/drawingml/2006/main" xmlns:r="http://schemas.openxmlformats.org/officeDocument/2006/relationships" xmlns:p="http://schemas.openxmlformats.org/presentationml/2006/main" showMasterSp="0" showMasterPhAnim="0">
+<p:notes xmlns:a="http://schemas.openxmlformats.org/drawingml/2006/main" xmlns:r="http://schemas.openxmlformats.org/officeDocument/2006/relationships" xmlns:p="http://schemas.openxmlformats.org/presentationml/2006/main" showMasterPhAnim="0" showMasterSp="0">
   <p:cSld>
     <p:spTree>
       <p:nvGrpSpPr>
@@ -988,7 +981,6 @@
               </a:spcAft>
               <a:buNone/>
             </a:pPr>
-            <a:endParaRPr/>
           </a:p>
         </p:txBody>
       </p:sp>
@@ -1034,11 +1026,6 @@
         </p:spPr>
       </p:sp>
     </p:spTree>
-    <p:extLst>
-      <p:ext uri="{BB962C8B-B14F-4D97-AF65-F5344CB8AC3E}">
-        <p14:creationId xmlns:p14="http://schemas.microsoft.com/office/powerpoint/2010/main" val="608435869"/>
-      </p:ext>
-    </p:extLst>
   </p:cSld>
   <p:clrMapOvr>
     <a:masterClrMapping/>
@@ -1047,7 +1034,7 @@
 </file>
 
 <file path=ppt/notesSlides/notesSlide4.xml><?xml version="1.0" encoding="utf-8"?>
-<p:notes xmlns:a="http://schemas.openxmlformats.org/drawingml/2006/main" xmlns:r="http://schemas.openxmlformats.org/officeDocument/2006/relationships" xmlns:p="http://schemas.openxmlformats.org/presentationml/2006/main" showMasterSp="0" showMasterPhAnim="0">
+<p:notes xmlns:a="http://schemas.openxmlformats.org/drawingml/2006/main" xmlns:r="http://schemas.openxmlformats.org/officeDocument/2006/relationships" xmlns:p="http://schemas.openxmlformats.org/presentationml/2006/main" showMasterPhAnim="0" showMasterSp="0">
   <p:cSld>
     <p:spTree>
       <p:nvGrpSpPr>
@@ -1097,7 +1084,6 @@
               </a:spcAft>
               <a:buNone/>
             </a:pPr>
-            <a:endParaRPr/>
           </a:p>
         </p:txBody>
       </p:sp>
@@ -1143,11 +1129,6 @@
         </p:spPr>
       </p:sp>
     </p:spTree>
-    <p:extLst>
-      <p:ext uri="{BB962C8B-B14F-4D97-AF65-F5344CB8AC3E}">
-        <p14:creationId xmlns:p14="http://schemas.microsoft.com/office/powerpoint/2010/main" val="2002330573"/>
-      </p:ext>
-    </p:extLst>
   </p:cSld>
   <p:clrMapOvr>
     <a:masterClrMapping/>
@@ -1156,7 +1137,7 @@
 </file>
 
 <file path=ppt/notesSlides/notesSlide5.xml><?xml version="1.0" encoding="utf-8"?>
-<p:notes xmlns:a="http://schemas.openxmlformats.org/drawingml/2006/main" xmlns:r="http://schemas.openxmlformats.org/officeDocument/2006/relationships" xmlns:p="http://schemas.openxmlformats.org/presentationml/2006/main" showMasterSp="0" showMasterPhAnim="0">
+<p:notes xmlns:a="http://schemas.openxmlformats.org/drawingml/2006/main" xmlns:r="http://schemas.openxmlformats.org/officeDocument/2006/relationships" xmlns:p="http://schemas.openxmlformats.org/presentationml/2006/main" showMasterPhAnim="0" showMasterSp="0">
   <p:cSld>
     <p:spTree>
       <p:nvGrpSpPr>
@@ -1206,7 +1187,6 @@
               </a:spcAft>
               <a:buNone/>
             </a:pPr>
-            <a:endParaRPr/>
           </a:p>
         </p:txBody>
       </p:sp>
@@ -1260,7 +1240,7 @@
 </file>
 
 <file path=ppt/notesSlides/notesSlide6.xml><?xml version="1.0" encoding="utf-8"?>
-<p:notes xmlns:a="http://schemas.openxmlformats.org/drawingml/2006/main" xmlns:r="http://schemas.openxmlformats.org/officeDocument/2006/relationships" xmlns:p="http://schemas.openxmlformats.org/presentationml/2006/main" showMasterSp="0" showMasterPhAnim="0">
+<p:notes xmlns:a="http://schemas.openxmlformats.org/drawingml/2006/main" xmlns:r="http://schemas.openxmlformats.org/officeDocument/2006/relationships" xmlns:p="http://schemas.openxmlformats.org/presentationml/2006/main" showMasterPhAnim="0" showMasterSp="0">
   <p:cSld>
     <p:spTree>
       <p:nvGrpSpPr>
@@ -1310,7 +1290,6 @@
               </a:spcAft>
               <a:buNone/>
             </a:pPr>
-            <a:endParaRPr/>
           </a:p>
         </p:txBody>
       </p:sp>
@@ -1356,11 +1335,6 @@
         </p:spPr>
       </p:sp>
     </p:spTree>
-    <p:extLst>
-      <p:ext uri="{BB962C8B-B14F-4D97-AF65-F5344CB8AC3E}">
-        <p14:creationId xmlns:p14="http://schemas.microsoft.com/office/powerpoint/2010/main" val="1381833031"/>
-      </p:ext>
-    </p:extLst>
   </p:cSld>
   <p:clrMapOvr>
     <a:masterClrMapping/>
@@ -1369,7 +1343,7 @@
 </file>
 
 <file path=ppt/notesSlides/notesSlide7.xml><?xml version="1.0" encoding="utf-8"?>
-<p:notes xmlns:a="http://schemas.openxmlformats.org/drawingml/2006/main" xmlns:r="http://schemas.openxmlformats.org/officeDocument/2006/relationships" xmlns:p="http://schemas.openxmlformats.org/presentationml/2006/main" showMasterSp="0" showMasterPhAnim="0">
+<p:notes xmlns:a="http://schemas.openxmlformats.org/drawingml/2006/main" xmlns:r="http://schemas.openxmlformats.org/officeDocument/2006/relationships" xmlns:p="http://schemas.openxmlformats.org/presentationml/2006/main" showMasterPhAnim="0" showMasterSp="0">
   <p:cSld>
     <p:spTree>
       <p:nvGrpSpPr>
@@ -1419,7 +1393,6 @@
               </a:spcAft>
               <a:buNone/>
             </a:pPr>
-            <a:endParaRPr/>
           </a:p>
         </p:txBody>
       </p:sp>
@@ -1465,11 +1438,6 @@
         </p:spPr>
       </p:sp>
     </p:spTree>
-    <p:extLst>
-      <p:ext uri="{BB962C8B-B14F-4D97-AF65-F5344CB8AC3E}">
-        <p14:creationId xmlns:p14="http://schemas.microsoft.com/office/powerpoint/2010/main" val="3142626350"/>
-      </p:ext>
-    </p:extLst>
   </p:cSld>
   <p:clrMapOvr>
     <a:masterClrMapping/>
@@ -1478,7 +1446,7 @@
 </file>
 
 <file path=ppt/notesSlides/notesSlide8.xml><?xml version="1.0" encoding="utf-8"?>
-<p:notes xmlns:a="http://schemas.openxmlformats.org/drawingml/2006/main" xmlns:r="http://schemas.openxmlformats.org/officeDocument/2006/relationships" xmlns:p="http://schemas.openxmlformats.org/presentationml/2006/main" showMasterSp="0" showMasterPhAnim="0">
+<p:notes xmlns:a="http://schemas.openxmlformats.org/drawingml/2006/main" xmlns:r="http://schemas.openxmlformats.org/officeDocument/2006/relationships" xmlns:p="http://schemas.openxmlformats.org/presentationml/2006/main" showMasterPhAnim="0" showMasterSp="0">
   <p:cSld>
     <p:spTree>
       <p:nvGrpSpPr>
@@ -1528,7 +1496,6 @@
               </a:spcAft>
               <a:buNone/>
             </a:pPr>
-            <a:endParaRPr/>
           </a:p>
         </p:txBody>
       </p:sp>
@@ -1582,7 +1549,7 @@
 </file>
 
 <file path=ppt/notesSlides/notesSlide9.xml><?xml version="1.0" encoding="utf-8"?>
-<p:notes xmlns:a="http://schemas.openxmlformats.org/drawingml/2006/main" xmlns:r="http://schemas.openxmlformats.org/officeDocument/2006/relationships" xmlns:p="http://schemas.openxmlformats.org/presentationml/2006/main" showMasterSp="0" showMasterPhAnim="0">
+<p:notes xmlns:a="http://schemas.openxmlformats.org/drawingml/2006/main" xmlns:r="http://schemas.openxmlformats.org/officeDocument/2006/relationships" xmlns:p="http://schemas.openxmlformats.org/presentationml/2006/main" showMasterPhAnim="0" showMasterSp="0">
   <p:cSld>
     <p:spTree>
       <p:nvGrpSpPr>
@@ -1632,7 +1599,6 @@
               </a:spcAft>
               <a:buNone/>
             </a:pPr>
-            <a:endParaRPr/>
           </a:p>
         </p:txBody>
       </p:sp>
@@ -1686,7 +1652,7 @@
 </file>
 
 <file path=ppt/slideLayouts/slideLayout1.xml><?xml version="1.0" encoding="utf-8"?>
-<p:sldLayout xmlns:a="http://schemas.openxmlformats.org/drawingml/2006/main" xmlns:r="http://schemas.openxmlformats.org/officeDocument/2006/relationships" xmlns:p="http://schemas.openxmlformats.org/presentationml/2006/main" matchingName="Title Slide" type="title">
+<p:sldLayout xmlns:a="http://schemas.openxmlformats.org/drawingml/2006/main" xmlns:r="http://schemas.openxmlformats.org/officeDocument/2006/relationships" xmlns:p="http://schemas.openxmlformats.org/presentationml/2006/main" type="title" matchingName="Title Slide">
   <p:cSld name="TITLE">
     <p:spTree>
       <p:nvGrpSpPr>
@@ -1744,7 +1710,7 @@
                 <a:schemeClr val="dk1"/>
               </a:buClr>
               <a:buSzPts val="6000"/>
-              <a:buFont typeface="Calibri"/>
+              <a:buFont typeface="Calibri" panose="020F0502020204030204"/>
               <a:buNone/>
               <a:defRPr sz="6000"/>
             </a:lvl1pPr>
@@ -1837,9 +1803,7 @@
               <a:defRPr/>
             </a:lvl9pPr>
           </a:lstStyle>
-          <a:p>
-            <a:endParaRPr/>
-          </a:p>
+          <a:p/>
         </p:txBody>
       </p:sp>
       <p:sp>
@@ -2024,9 +1988,7 @@
               <a:defRPr sz="1600"/>
             </a:lvl9pPr>
           </a:lstStyle>
-          <a:p>
-            <a:endParaRPr/>
-          </a:p>
+          <a:p/>
         </p:txBody>
       </p:sp>
       <p:sp>
@@ -2157,9 +2119,7 @@
               <a:defRPr/>
             </a:lvl9pPr>
           </a:lstStyle>
-          <a:p>
-            <a:endParaRPr/>
-          </a:p>
+          <a:p/>
         </p:txBody>
       </p:sp>
       <p:sp>
@@ -2290,9 +2250,7 @@
               <a:defRPr/>
             </a:lvl9pPr>
           </a:lstStyle>
-          <a:p>
-            <a:endParaRPr/>
-          </a:p>
+          <a:p/>
         </p:txBody>
       </p:sp>
       <p:sp>
@@ -2399,18 +2357,8 @@
             </a:pPr>
             <a:fld id="{00000000-1234-1234-1234-123412341234}" type="slidenum">
               <a:rPr lang="en-US"/>
-              <a:pPr marL="0" lvl="0" indent="0" algn="r" rtl="0">
-                <a:spcBef>
-                  <a:spcPts val="0"/>
-                </a:spcBef>
-                <a:spcAft>
-                  <a:spcPts val="0"/>
-                </a:spcAft>
-                <a:buNone/>
-              </a:pPr>
-              <a:t>‹#›</a:t>
             </a:fld>
-            <a:endParaRPr/>
+            <a:endParaRPr lang="en-US"/>
           </a:p>
         </p:txBody>
       </p:sp>
@@ -2423,7 +2371,7 @@
 </file>
 
 <file path=ppt/slideLayouts/slideLayout10.xml><?xml version="1.0" encoding="utf-8"?>
-<p:sldLayout xmlns:a="http://schemas.openxmlformats.org/drawingml/2006/main" xmlns:r="http://schemas.openxmlformats.org/officeDocument/2006/relationships" xmlns:p="http://schemas.openxmlformats.org/presentationml/2006/main" matchingName="Title and Vertical Text" type="vertTx">
+<p:sldLayout xmlns:a="http://schemas.openxmlformats.org/drawingml/2006/main" xmlns:r="http://schemas.openxmlformats.org/officeDocument/2006/relationships" xmlns:p="http://schemas.openxmlformats.org/presentationml/2006/main" type="vertTx" matchingName="Title and Vertical Text">
   <p:cSld name="VERTICAL_TEXT">
     <p:spTree>
       <p:nvGrpSpPr>
@@ -2573,9 +2521,7 @@
               <a:defRPr/>
             </a:lvl9pPr>
           </a:lstStyle>
-          <a:p>
-            <a:endParaRPr/>
-          </a:p>
+          <a:p/>
         </p:txBody>
       </p:sp>
       <p:sp>
@@ -2760,9 +2706,7 @@
               <a:defRPr/>
             </a:lvl9pPr>
           </a:lstStyle>
-          <a:p>
-            <a:endParaRPr/>
-          </a:p>
+          <a:p/>
         </p:txBody>
       </p:sp>
       <p:sp>
@@ -2893,9 +2837,7 @@
               <a:defRPr/>
             </a:lvl9pPr>
           </a:lstStyle>
-          <a:p>
-            <a:endParaRPr/>
-          </a:p>
+          <a:p/>
         </p:txBody>
       </p:sp>
       <p:sp>
@@ -3026,9 +2968,7 @@
               <a:defRPr/>
             </a:lvl9pPr>
           </a:lstStyle>
-          <a:p>
-            <a:endParaRPr/>
-          </a:p>
+          <a:p/>
         </p:txBody>
       </p:sp>
       <p:sp>
@@ -3135,18 +3075,8 @@
             </a:pPr>
             <a:fld id="{00000000-1234-1234-1234-123412341234}" type="slidenum">
               <a:rPr lang="en-US"/>
-              <a:pPr marL="0" lvl="0" indent="0" algn="r" rtl="0">
-                <a:spcBef>
-                  <a:spcPts val="0"/>
-                </a:spcBef>
-                <a:spcAft>
-                  <a:spcPts val="0"/>
-                </a:spcAft>
-                <a:buNone/>
-              </a:pPr>
-              <a:t>‹#›</a:t>
             </a:fld>
-            <a:endParaRPr/>
+            <a:endParaRPr lang="en-US"/>
           </a:p>
         </p:txBody>
       </p:sp>
@@ -3159,7 +3089,7 @@
 </file>
 
 <file path=ppt/slideLayouts/slideLayout11.xml><?xml version="1.0" encoding="utf-8"?>
-<p:sldLayout xmlns:a="http://schemas.openxmlformats.org/drawingml/2006/main" xmlns:r="http://schemas.openxmlformats.org/officeDocument/2006/relationships" xmlns:p="http://schemas.openxmlformats.org/presentationml/2006/main" matchingName="Vertical Title and Text" type="vertTitleAndTx">
+<p:sldLayout xmlns:a="http://schemas.openxmlformats.org/drawingml/2006/main" xmlns:r="http://schemas.openxmlformats.org/officeDocument/2006/relationships" xmlns:p="http://schemas.openxmlformats.org/presentationml/2006/main" type="vertTitleAndTx" matchingName="Vertical Title and Text">
   <p:cSld name="VERTICAL_TITLE_AND_VERTICAL_TEXT">
     <p:spTree>
       <p:nvGrpSpPr>
@@ -3309,9 +3239,7 @@
               <a:defRPr/>
             </a:lvl9pPr>
           </a:lstStyle>
-          <a:p>
-            <a:endParaRPr/>
-          </a:p>
+          <a:p/>
         </p:txBody>
       </p:sp>
       <p:sp>
@@ -3496,9 +3424,7 @@
               <a:defRPr/>
             </a:lvl9pPr>
           </a:lstStyle>
-          <a:p>
-            <a:endParaRPr/>
-          </a:p>
+          <a:p/>
         </p:txBody>
       </p:sp>
       <p:sp>
@@ -3629,9 +3555,7 @@
               <a:defRPr/>
             </a:lvl9pPr>
           </a:lstStyle>
-          <a:p>
-            <a:endParaRPr/>
-          </a:p>
+          <a:p/>
         </p:txBody>
       </p:sp>
       <p:sp>
@@ -3762,9 +3686,7 @@
               <a:defRPr/>
             </a:lvl9pPr>
           </a:lstStyle>
-          <a:p>
-            <a:endParaRPr/>
-          </a:p>
+          <a:p/>
         </p:txBody>
       </p:sp>
       <p:sp>
@@ -3871,18 +3793,8 @@
             </a:pPr>
             <a:fld id="{00000000-1234-1234-1234-123412341234}" type="slidenum">
               <a:rPr lang="en-US"/>
-              <a:pPr marL="0" lvl="0" indent="0" algn="r" rtl="0">
-                <a:spcBef>
-                  <a:spcPts val="0"/>
-                </a:spcBef>
-                <a:spcAft>
-                  <a:spcPts val="0"/>
-                </a:spcAft>
-                <a:buNone/>
-              </a:pPr>
-              <a:t>‹#›</a:t>
             </a:fld>
-            <a:endParaRPr/>
+            <a:endParaRPr lang="en-US"/>
           </a:p>
         </p:txBody>
       </p:sp>
@@ -3895,7 +3807,7 @@
 </file>
 
 <file path=ppt/slideLayouts/slideLayout2.xml><?xml version="1.0" encoding="utf-8"?>
-<p:sldLayout xmlns:a="http://schemas.openxmlformats.org/drawingml/2006/main" xmlns:r="http://schemas.openxmlformats.org/officeDocument/2006/relationships" xmlns:p="http://schemas.openxmlformats.org/presentationml/2006/main" matchingName="Title and Content" type="obj">
+<p:sldLayout xmlns:a="http://schemas.openxmlformats.org/drawingml/2006/main" xmlns:r="http://schemas.openxmlformats.org/officeDocument/2006/relationships" xmlns:p="http://schemas.openxmlformats.org/presentationml/2006/main" type="obj" matchingName="Title and Content">
   <p:cSld name="OBJECT">
     <p:spTree>
       <p:nvGrpSpPr>
@@ -4045,9 +3957,7 @@
               <a:defRPr/>
             </a:lvl9pPr>
           </a:lstStyle>
-          <a:p>
-            <a:endParaRPr/>
-          </a:p>
+          <a:p/>
         </p:txBody>
       </p:sp>
       <p:sp>
@@ -4232,9 +4142,7 @@
               <a:defRPr/>
             </a:lvl9pPr>
           </a:lstStyle>
-          <a:p>
-            <a:endParaRPr/>
-          </a:p>
+          <a:p/>
         </p:txBody>
       </p:sp>
       <p:sp>
@@ -4365,9 +4273,7 @@
               <a:defRPr/>
             </a:lvl9pPr>
           </a:lstStyle>
-          <a:p>
-            <a:endParaRPr/>
-          </a:p>
+          <a:p/>
         </p:txBody>
       </p:sp>
       <p:sp>
@@ -4498,9 +4404,7 @@
               <a:defRPr/>
             </a:lvl9pPr>
           </a:lstStyle>
-          <a:p>
-            <a:endParaRPr/>
-          </a:p>
+          <a:p/>
         </p:txBody>
       </p:sp>
       <p:sp>
@@ -4607,18 +4511,8 @@
             </a:pPr>
             <a:fld id="{00000000-1234-1234-1234-123412341234}" type="slidenum">
               <a:rPr lang="en-US"/>
-              <a:pPr marL="0" lvl="0" indent="0" algn="r" rtl="0">
-                <a:spcBef>
-                  <a:spcPts val="0"/>
-                </a:spcBef>
-                <a:spcAft>
-                  <a:spcPts val="0"/>
-                </a:spcAft>
-                <a:buNone/>
-              </a:pPr>
-              <a:t>‹#›</a:t>
             </a:fld>
-            <a:endParaRPr/>
+            <a:endParaRPr lang="en-US"/>
           </a:p>
         </p:txBody>
       </p:sp>
@@ -4631,7 +4525,7 @@
 </file>
 
 <file path=ppt/slideLayouts/slideLayout3.xml><?xml version="1.0" encoding="utf-8"?>
-<p:sldLayout xmlns:a="http://schemas.openxmlformats.org/drawingml/2006/main" xmlns:r="http://schemas.openxmlformats.org/officeDocument/2006/relationships" xmlns:p="http://schemas.openxmlformats.org/presentationml/2006/main" matchingName="Section Header" type="secHead">
+<p:sldLayout xmlns:a="http://schemas.openxmlformats.org/drawingml/2006/main" xmlns:r="http://schemas.openxmlformats.org/officeDocument/2006/relationships" xmlns:p="http://schemas.openxmlformats.org/presentationml/2006/main" type="secHead" matchingName="Section Header">
   <p:cSld name="SECTION_HEADER">
     <p:spTree>
       <p:nvGrpSpPr>
@@ -4689,7 +4583,7 @@
                 <a:schemeClr val="dk1"/>
               </a:buClr>
               <a:buSzPts val="6000"/>
-              <a:buFont typeface="Calibri"/>
+              <a:buFont typeface="Calibri" panose="020F0502020204030204"/>
               <a:buNone/>
               <a:defRPr sz="6000"/>
             </a:lvl1pPr>
@@ -4782,9 +4676,7 @@
               <a:defRPr/>
             </a:lvl9pPr>
           </a:lstStyle>
-          <a:p>
-            <a:endParaRPr/>
-          </a:p>
+          <a:p/>
         </p:txBody>
       </p:sp>
       <p:sp>
@@ -5005,9 +4897,7 @@
               </a:defRPr>
             </a:lvl9pPr>
           </a:lstStyle>
-          <a:p>
-            <a:endParaRPr/>
-          </a:p>
+          <a:p/>
         </p:txBody>
       </p:sp>
       <p:sp>
@@ -5138,9 +5028,7 @@
               <a:defRPr/>
             </a:lvl9pPr>
           </a:lstStyle>
-          <a:p>
-            <a:endParaRPr/>
-          </a:p>
+          <a:p/>
         </p:txBody>
       </p:sp>
       <p:sp>
@@ -5271,9 +5159,7 @@
               <a:defRPr/>
             </a:lvl9pPr>
           </a:lstStyle>
-          <a:p>
-            <a:endParaRPr/>
-          </a:p>
+          <a:p/>
         </p:txBody>
       </p:sp>
       <p:sp>
@@ -5380,18 +5266,8 @@
             </a:pPr>
             <a:fld id="{00000000-1234-1234-1234-123412341234}" type="slidenum">
               <a:rPr lang="en-US"/>
-              <a:pPr marL="0" lvl="0" indent="0" algn="r" rtl="0">
-                <a:spcBef>
-                  <a:spcPts val="0"/>
-                </a:spcBef>
-                <a:spcAft>
-                  <a:spcPts val="0"/>
-                </a:spcAft>
-                <a:buNone/>
-              </a:pPr>
-              <a:t>‹#›</a:t>
             </a:fld>
-            <a:endParaRPr/>
+            <a:endParaRPr lang="en-US"/>
           </a:p>
         </p:txBody>
       </p:sp>
@@ -5404,7 +5280,7 @@
 </file>
 
 <file path=ppt/slideLayouts/slideLayout4.xml><?xml version="1.0" encoding="utf-8"?>
-<p:sldLayout xmlns:a="http://schemas.openxmlformats.org/drawingml/2006/main" xmlns:r="http://schemas.openxmlformats.org/officeDocument/2006/relationships" xmlns:p="http://schemas.openxmlformats.org/presentationml/2006/main" matchingName="Two Content" type="twoObj">
+<p:sldLayout xmlns:a="http://schemas.openxmlformats.org/drawingml/2006/main" xmlns:r="http://schemas.openxmlformats.org/officeDocument/2006/relationships" xmlns:p="http://schemas.openxmlformats.org/presentationml/2006/main" type="twoObj" matchingName="Two Content">
   <p:cSld name="TWO_OBJECTS">
     <p:spTree>
       <p:nvGrpSpPr>
@@ -5554,9 +5430,7 @@
               <a:defRPr/>
             </a:lvl9pPr>
           </a:lstStyle>
-          <a:p>
-            <a:endParaRPr/>
-          </a:p>
+          <a:p/>
         </p:txBody>
       </p:sp>
       <p:sp>
@@ -5741,9 +5615,7 @@
               <a:defRPr/>
             </a:lvl9pPr>
           </a:lstStyle>
-          <a:p>
-            <a:endParaRPr/>
-          </a:p>
+          <a:p/>
         </p:txBody>
       </p:sp>
       <p:sp>
@@ -5928,9 +5800,7 @@
               <a:defRPr/>
             </a:lvl9pPr>
           </a:lstStyle>
-          <a:p>
-            <a:endParaRPr/>
-          </a:p>
+          <a:p/>
         </p:txBody>
       </p:sp>
       <p:sp>
@@ -6061,9 +5931,7 @@
               <a:defRPr/>
             </a:lvl9pPr>
           </a:lstStyle>
-          <a:p>
-            <a:endParaRPr/>
-          </a:p>
+          <a:p/>
         </p:txBody>
       </p:sp>
       <p:sp>
@@ -6194,9 +6062,7 @@
               <a:defRPr/>
             </a:lvl9pPr>
           </a:lstStyle>
-          <a:p>
-            <a:endParaRPr/>
-          </a:p>
+          <a:p/>
         </p:txBody>
       </p:sp>
       <p:sp>
@@ -6303,18 +6169,8 @@
             </a:pPr>
             <a:fld id="{00000000-1234-1234-1234-123412341234}" type="slidenum">
               <a:rPr lang="en-US"/>
-              <a:pPr marL="0" lvl="0" indent="0" algn="r" rtl="0">
-                <a:spcBef>
-                  <a:spcPts val="0"/>
-                </a:spcBef>
-                <a:spcAft>
-                  <a:spcPts val="0"/>
-                </a:spcAft>
-                <a:buNone/>
-              </a:pPr>
-              <a:t>‹#›</a:t>
             </a:fld>
-            <a:endParaRPr/>
+            <a:endParaRPr lang="en-US"/>
           </a:p>
         </p:txBody>
       </p:sp>
@@ -6327,7 +6183,7 @@
 </file>
 
 <file path=ppt/slideLayouts/slideLayout5.xml><?xml version="1.0" encoding="utf-8"?>
-<p:sldLayout xmlns:a="http://schemas.openxmlformats.org/drawingml/2006/main" xmlns:r="http://schemas.openxmlformats.org/officeDocument/2006/relationships" xmlns:p="http://schemas.openxmlformats.org/presentationml/2006/main" matchingName="Comparison" type="twoTxTwoObj">
+<p:sldLayout xmlns:a="http://schemas.openxmlformats.org/drawingml/2006/main" xmlns:r="http://schemas.openxmlformats.org/officeDocument/2006/relationships" xmlns:p="http://schemas.openxmlformats.org/presentationml/2006/main" type="twoTxTwoObj" matchingName="Comparison">
   <p:cSld name="TWO_OBJECTS_WITH_TEXT">
     <p:spTree>
       <p:nvGrpSpPr>
@@ -6477,9 +6333,7 @@
               <a:defRPr/>
             </a:lvl9pPr>
           </a:lstStyle>
-          <a:p>
-            <a:endParaRPr/>
-          </a:p>
+          <a:p/>
         </p:txBody>
       </p:sp>
       <p:sp>
@@ -6664,9 +6518,7 @@
               <a:defRPr sz="1600" b="1"/>
             </a:lvl9pPr>
           </a:lstStyle>
-          <a:p>
-            <a:endParaRPr/>
-          </a:p>
+          <a:p/>
         </p:txBody>
       </p:sp>
       <p:sp>
@@ -6851,9 +6703,7 @@
               <a:defRPr/>
             </a:lvl9pPr>
           </a:lstStyle>
-          <a:p>
-            <a:endParaRPr/>
-          </a:p>
+          <a:p/>
         </p:txBody>
       </p:sp>
       <p:sp>
@@ -7038,9 +6888,7 @@
               <a:defRPr sz="1600" b="1"/>
             </a:lvl9pPr>
           </a:lstStyle>
-          <a:p>
-            <a:endParaRPr/>
-          </a:p>
+          <a:p/>
         </p:txBody>
       </p:sp>
       <p:sp>
@@ -7225,9 +7073,7 @@
               <a:defRPr/>
             </a:lvl9pPr>
           </a:lstStyle>
-          <a:p>
-            <a:endParaRPr/>
-          </a:p>
+          <a:p/>
         </p:txBody>
       </p:sp>
       <p:sp>
@@ -7358,9 +7204,7 @@
               <a:defRPr/>
             </a:lvl9pPr>
           </a:lstStyle>
-          <a:p>
-            <a:endParaRPr/>
-          </a:p>
+          <a:p/>
         </p:txBody>
       </p:sp>
       <p:sp>
@@ -7491,9 +7335,7 @@
               <a:defRPr/>
             </a:lvl9pPr>
           </a:lstStyle>
-          <a:p>
-            <a:endParaRPr/>
-          </a:p>
+          <a:p/>
         </p:txBody>
       </p:sp>
       <p:sp>
@@ -7600,18 +7442,8 @@
             </a:pPr>
             <a:fld id="{00000000-1234-1234-1234-123412341234}" type="slidenum">
               <a:rPr lang="en-US"/>
-              <a:pPr marL="0" lvl="0" indent="0" algn="r" rtl="0">
-                <a:spcBef>
-                  <a:spcPts val="0"/>
-                </a:spcBef>
-                <a:spcAft>
-                  <a:spcPts val="0"/>
-                </a:spcAft>
-                <a:buNone/>
-              </a:pPr>
-              <a:t>‹#›</a:t>
             </a:fld>
-            <a:endParaRPr/>
+            <a:endParaRPr lang="en-US"/>
           </a:p>
         </p:txBody>
       </p:sp>
@@ -7624,7 +7456,7 @@
 </file>
 
 <file path=ppt/slideLayouts/slideLayout6.xml><?xml version="1.0" encoding="utf-8"?>
-<p:sldLayout xmlns:a="http://schemas.openxmlformats.org/drawingml/2006/main" xmlns:r="http://schemas.openxmlformats.org/officeDocument/2006/relationships" xmlns:p="http://schemas.openxmlformats.org/presentationml/2006/main" matchingName="Title Only" type="titleOnly">
+<p:sldLayout xmlns:a="http://schemas.openxmlformats.org/drawingml/2006/main" xmlns:r="http://schemas.openxmlformats.org/officeDocument/2006/relationships" xmlns:p="http://schemas.openxmlformats.org/presentationml/2006/main" type="titleOnly" matchingName="Title Only">
   <p:cSld name="TITLE_ONLY">
     <p:spTree>
       <p:nvGrpSpPr>
@@ -7774,9 +7606,7 @@
               <a:defRPr/>
             </a:lvl9pPr>
           </a:lstStyle>
-          <a:p>
-            <a:endParaRPr/>
-          </a:p>
+          <a:p/>
         </p:txBody>
       </p:sp>
       <p:sp>
@@ -7907,9 +7737,7 @@
               <a:defRPr/>
             </a:lvl9pPr>
           </a:lstStyle>
-          <a:p>
-            <a:endParaRPr/>
-          </a:p>
+          <a:p/>
         </p:txBody>
       </p:sp>
       <p:sp>
@@ -8040,9 +7868,7 @@
               <a:defRPr/>
             </a:lvl9pPr>
           </a:lstStyle>
-          <a:p>
-            <a:endParaRPr/>
-          </a:p>
+          <a:p/>
         </p:txBody>
       </p:sp>
       <p:sp>
@@ -8149,18 +7975,8 @@
             </a:pPr>
             <a:fld id="{00000000-1234-1234-1234-123412341234}" type="slidenum">
               <a:rPr lang="en-US"/>
-              <a:pPr marL="0" lvl="0" indent="0" algn="r" rtl="0">
-                <a:spcBef>
-                  <a:spcPts val="0"/>
-                </a:spcBef>
-                <a:spcAft>
-                  <a:spcPts val="0"/>
-                </a:spcAft>
-                <a:buNone/>
-              </a:pPr>
-              <a:t>‹#›</a:t>
             </a:fld>
-            <a:endParaRPr/>
+            <a:endParaRPr lang="en-US"/>
           </a:p>
         </p:txBody>
       </p:sp>
@@ -8173,7 +7989,7 @@
 </file>
 
 <file path=ppt/slideLayouts/slideLayout7.xml><?xml version="1.0" encoding="utf-8"?>
-<p:sldLayout xmlns:a="http://schemas.openxmlformats.org/drawingml/2006/main" xmlns:r="http://schemas.openxmlformats.org/officeDocument/2006/relationships" xmlns:p="http://schemas.openxmlformats.org/presentationml/2006/main" matchingName="Blank" type="blank">
+<p:sldLayout xmlns:a="http://schemas.openxmlformats.org/drawingml/2006/main" xmlns:r="http://schemas.openxmlformats.org/officeDocument/2006/relationships" xmlns:p="http://schemas.openxmlformats.org/presentationml/2006/main" type="blank" matchingName="Blank">
   <p:cSld name="BLANK">
     <p:spTree>
       <p:nvGrpSpPr>
@@ -8317,9 +8133,7 @@
               <a:defRPr/>
             </a:lvl9pPr>
           </a:lstStyle>
-          <a:p>
-            <a:endParaRPr/>
-          </a:p>
+          <a:p/>
         </p:txBody>
       </p:sp>
       <p:sp>
@@ -8450,9 +8264,7 @@
               <a:defRPr/>
             </a:lvl9pPr>
           </a:lstStyle>
-          <a:p>
-            <a:endParaRPr/>
-          </a:p>
+          <a:p/>
         </p:txBody>
       </p:sp>
       <p:sp>
@@ -8559,18 +8371,8 @@
             </a:pPr>
             <a:fld id="{00000000-1234-1234-1234-123412341234}" type="slidenum">
               <a:rPr lang="en-US"/>
-              <a:pPr marL="0" lvl="0" indent="0" algn="r" rtl="0">
-                <a:spcBef>
-                  <a:spcPts val="0"/>
-                </a:spcBef>
-                <a:spcAft>
-                  <a:spcPts val="0"/>
-                </a:spcAft>
-                <a:buNone/>
-              </a:pPr>
-              <a:t>‹#›</a:t>
             </a:fld>
-            <a:endParaRPr/>
+            <a:endParaRPr lang="en-US"/>
           </a:p>
         </p:txBody>
       </p:sp>
@@ -8583,7 +8385,7 @@
 </file>
 
 <file path=ppt/slideLayouts/slideLayout8.xml><?xml version="1.0" encoding="utf-8"?>
-<p:sldLayout xmlns:a="http://schemas.openxmlformats.org/drawingml/2006/main" xmlns:r="http://schemas.openxmlformats.org/officeDocument/2006/relationships" xmlns:p="http://schemas.openxmlformats.org/presentationml/2006/main" matchingName="Content with Caption" type="objTx">
+<p:sldLayout xmlns:a="http://schemas.openxmlformats.org/drawingml/2006/main" xmlns:r="http://schemas.openxmlformats.org/officeDocument/2006/relationships" xmlns:p="http://schemas.openxmlformats.org/presentationml/2006/main" type="objTx" matchingName="Content with Caption">
   <p:cSld name="OBJECT_WITH_CAPTION_TEXT">
     <p:spTree>
       <p:nvGrpSpPr>
@@ -8641,7 +8443,7 @@
                 <a:schemeClr val="dk1"/>
               </a:buClr>
               <a:buSzPts val="3200"/>
-              <a:buFont typeface="Calibri"/>
+              <a:buFont typeface="Calibri" panose="020F0502020204030204"/>
               <a:buNone/>
               <a:defRPr sz="3200"/>
             </a:lvl1pPr>
@@ -8734,9 +8536,7 @@
               <a:defRPr/>
             </a:lvl9pPr>
           </a:lstStyle>
-          <a:p>
-            <a:endParaRPr/>
-          </a:p>
+          <a:p/>
         </p:txBody>
       </p:sp>
       <p:sp>
@@ -8921,9 +8721,7 @@
               <a:defRPr sz="2000"/>
             </a:lvl9pPr>
           </a:lstStyle>
-          <a:p>
-            <a:endParaRPr/>
-          </a:p>
+          <a:p/>
         </p:txBody>
       </p:sp>
       <p:sp>
@@ -9108,9 +8906,7 @@
               <a:defRPr sz="1000"/>
             </a:lvl9pPr>
           </a:lstStyle>
-          <a:p>
-            <a:endParaRPr/>
-          </a:p>
+          <a:p/>
         </p:txBody>
       </p:sp>
       <p:sp>
@@ -9241,9 +9037,7 @@
               <a:defRPr/>
             </a:lvl9pPr>
           </a:lstStyle>
-          <a:p>
-            <a:endParaRPr/>
-          </a:p>
+          <a:p/>
         </p:txBody>
       </p:sp>
       <p:sp>
@@ -9374,9 +9168,7 @@
               <a:defRPr/>
             </a:lvl9pPr>
           </a:lstStyle>
-          <a:p>
-            <a:endParaRPr/>
-          </a:p>
+          <a:p/>
         </p:txBody>
       </p:sp>
       <p:sp>
@@ -9483,18 +9275,8 @@
             </a:pPr>
             <a:fld id="{00000000-1234-1234-1234-123412341234}" type="slidenum">
               <a:rPr lang="en-US"/>
-              <a:pPr marL="0" lvl="0" indent="0" algn="r" rtl="0">
-                <a:spcBef>
-                  <a:spcPts val="0"/>
-                </a:spcBef>
-                <a:spcAft>
-                  <a:spcPts val="0"/>
-                </a:spcAft>
-                <a:buNone/>
-              </a:pPr>
-              <a:t>‹#›</a:t>
             </a:fld>
-            <a:endParaRPr/>
+            <a:endParaRPr lang="en-US"/>
           </a:p>
         </p:txBody>
       </p:sp>
@@ -9507,7 +9289,7 @@
 </file>
 
 <file path=ppt/slideLayouts/slideLayout9.xml><?xml version="1.0" encoding="utf-8"?>
-<p:sldLayout xmlns:a="http://schemas.openxmlformats.org/drawingml/2006/main" xmlns:r="http://schemas.openxmlformats.org/officeDocument/2006/relationships" xmlns:p="http://schemas.openxmlformats.org/presentationml/2006/main" matchingName="Picture with Caption" type="picTx">
+<p:sldLayout xmlns:a="http://schemas.openxmlformats.org/drawingml/2006/main" xmlns:r="http://schemas.openxmlformats.org/officeDocument/2006/relationships" xmlns:p="http://schemas.openxmlformats.org/presentationml/2006/main" type="picTx" matchingName="Picture with Caption">
   <p:cSld name="PICTURE_WITH_CAPTION_TEXT">
     <p:spTree>
       <p:nvGrpSpPr>
@@ -9565,7 +9347,7 @@
                 <a:schemeClr val="dk1"/>
               </a:buClr>
               <a:buSzPts val="3200"/>
-              <a:buFont typeface="Calibri"/>
+              <a:buFont typeface="Calibri" panose="020F0502020204030204"/>
               <a:buNone/>
               <a:defRPr sz="3200"/>
             </a:lvl1pPr>
@@ -9658,9 +9440,7 @@
               <a:defRPr/>
             </a:lvl9pPr>
           </a:lstStyle>
-          <a:p>
-            <a:endParaRPr/>
-          </a:p>
+          <a:p/>
         </p:txBody>
       </p:sp>
       <p:sp>
@@ -9869,9 +9649,7 @@
               <a:defRPr sz="1000"/>
             </a:lvl9pPr>
           </a:lstStyle>
-          <a:p>
-            <a:endParaRPr/>
-          </a:p>
+          <a:p/>
         </p:txBody>
       </p:sp>
       <p:sp>
@@ -10002,9 +9780,7 @@
               <a:defRPr/>
             </a:lvl9pPr>
           </a:lstStyle>
-          <a:p>
-            <a:endParaRPr/>
-          </a:p>
+          <a:p/>
         </p:txBody>
       </p:sp>
       <p:sp>
@@ -10135,9 +9911,7 @@
               <a:defRPr/>
             </a:lvl9pPr>
           </a:lstStyle>
-          <a:p>
-            <a:endParaRPr/>
-          </a:p>
+          <a:p/>
         </p:txBody>
       </p:sp>
       <p:sp>
@@ -10244,18 +10018,8 @@
             </a:pPr>
             <a:fld id="{00000000-1234-1234-1234-123412341234}" type="slidenum">
               <a:rPr lang="en-US"/>
-              <a:pPr marL="0" lvl="0" indent="0" algn="r" rtl="0">
-                <a:spcBef>
-                  <a:spcPts val="0"/>
-                </a:spcBef>
-                <a:spcAft>
-                  <a:spcPts val="0"/>
-                </a:spcAft>
-                <a:buNone/>
-              </a:pPr>
-              <a:t>‹#›</a:t>
             </a:fld>
-            <a:endParaRPr/>
+            <a:endParaRPr lang="en-US"/>
           </a:p>
         </p:txBody>
       </p:sp>
@@ -10334,16 +10098,16 @@
                 <a:schemeClr val="dk1"/>
               </a:buClr>
               <a:buSzPts val="4400"/>
-              <a:buFont typeface="Calibri"/>
+              <a:buFont typeface="Calibri" panose="020F0502020204030204"/>
               <a:buNone/>
               <a:defRPr sz="4400" b="0" i="0" u="none" strike="noStrike" cap="none">
                 <a:solidFill>
                   <a:schemeClr val="dk1"/>
                 </a:solidFill>
-                <a:latin typeface="Calibri"/>
-                <a:ea typeface="Calibri"/>
-                <a:cs typeface="Calibri"/>
-                <a:sym typeface="Calibri"/>
+                <a:latin typeface="Calibri" panose="020F0502020204030204"/>
+                <a:ea typeface="Calibri" panose="020F0502020204030204"/>
+                <a:cs typeface="Calibri" panose="020F0502020204030204"/>
+                <a:sym typeface="Calibri" panose="020F0502020204030204"/>
               </a:defRPr>
             </a:lvl1pPr>
             <a:lvl2pPr lvl="1">
@@ -10435,9 +10199,7 @@
               <a:defRPr sz="1800"/>
             </a:lvl9pPr>
           </a:lstStyle>
-          <a:p>
-            <a:endParaRPr/>
-          </a:p>
+          <a:p/>
         </p:txBody>
       </p:sp>
       <p:sp>
@@ -10482,16 +10244,16 @@
                 <a:schemeClr val="dk1"/>
               </a:buClr>
               <a:buSzPts val="2800"/>
-              <a:buFont typeface="Arial"/>
+              <a:buFont typeface="Arial" panose="020B0604020202020204"/>
               <a:buChar char="•"/>
               <a:defRPr sz="2800" b="0" i="0" u="none" strike="noStrike" cap="none">
                 <a:solidFill>
                   <a:schemeClr val="dk1"/>
                 </a:solidFill>
-                <a:latin typeface="Calibri"/>
-                <a:ea typeface="Calibri"/>
-                <a:cs typeface="Calibri"/>
-                <a:sym typeface="Calibri"/>
+                <a:latin typeface="Calibri" panose="020F0502020204030204"/>
+                <a:ea typeface="Calibri" panose="020F0502020204030204"/>
+                <a:cs typeface="Calibri" panose="020F0502020204030204"/>
+                <a:sym typeface="Calibri" panose="020F0502020204030204"/>
               </a:defRPr>
             </a:lvl1pPr>
             <a:lvl2pPr marL="914400" marR="0" lvl="1" indent="-381000" algn="l" rtl="0">
@@ -10508,16 +10270,16 @@
                 <a:schemeClr val="dk1"/>
               </a:buClr>
               <a:buSzPts val="2400"/>
-              <a:buFont typeface="Arial"/>
+              <a:buFont typeface="Arial" panose="020B0604020202020204"/>
               <a:buChar char="•"/>
               <a:defRPr sz="2400" b="0" i="0" u="none" strike="noStrike" cap="none">
                 <a:solidFill>
                   <a:schemeClr val="dk1"/>
                 </a:solidFill>
-                <a:latin typeface="Calibri"/>
-                <a:ea typeface="Calibri"/>
-                <a:cs typeface="Calibri"/>
-                <a:sym typeface="Calibri"/>
+                <a:latin typeface="Calibri" panose="020F0502020204030204"/>
+                <a:ea typeface="Calibri" panose="020F0502020204030204"/>
+                <a:cs typeface="Calibri" panose="020F0502020204030204"/>
+                <a:sym typeface="Calibri" panose="020F0502020204030204"/>
               </a:defRPr>
             </a:lvl2pPr>
             <a:lvl3pPr marL="1371600" marR="0" lvl="2" indent="-355600" algn="l" rtl="0">
@@ -10534,16 +10296,16 @@
                 <a:schemeClr val="dk1"/>
               </a:buClr>
               <a:buSzPts val="2000"/>
-              <a:buFont typeface="Arial"/>
+              <a:buFont typeface="Arial" panose="020B0604020202020204"/>
               <a:buChar char="•"/>
               <a:defRPr sz="2000" b="0" i="0" u="none" strike="noStrike" cap="none">
                 <a:solidFill>
                   <a:schemeClr val="dk1"/>
                 </a:solidFill>
-                <a:latin typeface="Calibri"/>
-                <a:ea typeface="Calibri"/>
-                <a:cs typeface="Calibri"/>
-                <a:sym typeface="Calibri"/>
+                <a:latin typeface="Calibri" panose="020F0502020204030204"/>
+                <a:ea typeface="Calibri" panose="020F0502020204030204"/>
+                <a:cs typeface="Calibri" panose="020F0502020204030204"/>
+                <a:sym typeface="Calibri" panose="020F0502020204030204"/>
               </a:defRPr>
             </a:lvl3pPr>
             <a:lvl4pPr marL="1828800" marR="0" lvl="3" indent="-342900" algn="l" rtl="0">
@@ -10560,16 +10322,16 @@
                 <a:schemeClr val="dk1"/>
               </a:buClr>
               <a:buSzPts val="1800"/>
-              <a:buFont typeface="Arial"/>
+              <a:buFont typeface="Arial" panose="020B0604020202020204"/>
               <a:buChar char="•"/>
               <a:defRPr sz="1800" b="0" i="0" u="none" strike="noStrike" cap="none">
                 <a:solidFill>
                   <a:schemeClr val="dk1"/>
                 </a:solidFill>
-                <a:latin typeface="Calibri"/>
-                <a:ea typeface="Calibri"/>
-                <a:cs typeface="Calibri"/>
-                <a:sym typeface="Calibri"/>
+                <a:latin typeface="Calibri" panose="020F0502020204030204"/>
+                <a:ea typeface="Calibri" panose="020F0502020204030204"/>
+                <a:cs typeface="Calibri" panose="020F0502020204030204"/>
+                <a:sym typeface="Calibri" panose="020F0502020204030204"/>
               </a:defRPr>
             </a:lvl4pPr>
             <a:lvl5pPr marL="2286000" marR="0" lvl="4" indent="-342900" algn="l" rtl="0">
@@ -10586,16 +10348,16 @@
                 <a:schemeClr val="dk1"/>
               </a:buClr>
               <a:buSzPts val="1800"/>
-              <a:buFont typeface="Arial"/>
+              <a:buFont typeface="Arial" panose="020B0604020202020204"/>
               <a:buChar char="•"/>
               <a:defRPr sz="1800" b="0" i="0" u="none" strike="noStrike" cap="none">
                 <a:solidFill>
                   <a:schemeClr val="dk1"/>
                 </a:solidFill>
-                <a:latin typeface="Calibri"/>
-                <a:ea typeface="Calibri"/>
-                <a:cs typeface="Calibri"/>
-                <a:sym typeface="Calibri"/>
+                <a:latin typeface="Calibri" panose="020F0502020204030204"/>
+                <a:ea typeface="Calibri" panose="020F0502020204030204"/>
+                <a:cs typeface="Calibri" panose="020F0502020204030204"/>
+                <a:sym typeface="Calibri" panose="020F0502020204030204"/>
               </a:defRPr>
             </a:lvl5pPr>
             <a:lvl6pPr marL="2743200" marR="0" lvl="5" indent="-342900" algn="l" rtl="0">
@@ -10612,16 +10374,16 @@
                 <a:schemeClr val="dk1"/>
               </a:buClr>
               <a:buSzPts val="1800"/>
-              <a:buFont typeface="Arial"/>
+              <a:buFont typeface="Arial" panose="020B0604020202020204"/>
               <a:buChar char="•"/>
               <a:defRPr sz="1800" b="0" i="0" u="none" strike="noStrike" cap="none">
                 <a:solidFill>
                   <a:schemeClr val="dk1"/>
                 </a:solidFill>
-                <a:latin typeface="Calibri"/>
-                <a:ea typeface="Calibri"/>
-                <a:cs typeface="Calibri"/>
-                <a:sym typeface="Calibri"/>
+                <a:latin typeface="Calibri" panose="020F0502020204030204"/>
+                <a:ea typeface="Calibri" panose="020F0502020204030204"/>
+                <a:cs typeface="Calibri" panose="020F0502020204030204"/>
+                <a:sym typeface="Calibri" panose="020F0502020204030204"/>
               </a:defRPr>
             </a:lvl6pPr>
             <a:lvl7pPr marL="3200400" marR="0" lvl="6" indent="-342900" algn="l" rtl="0">
@@ -10638,16 +10400,16 @@
                 <a:schemeClr val="dk1"/>
               </a:buClr>
               <a:buSzPts val="1800"/>
-              <a:buFont typeface="Arial"/>
+              <a:buFont typeface="Arial" panose="020B0604020202020204"/>
               <a:buChar char="•"/>
               <a:defRPr sz="1800" b="0" i="0" u="none" strike="noStrike" cap="none">
                 <a:solidFill>
                   <a:schemeClr val="dk1"/>
                 </a:solidFill>
-                <a:latin typeface="Calibri"/>
-                <a:ea typeface="Calibri"/>
-                <a:cs typeface="Calibri"/>
-                <a:sym typeface="Calibri"/>
+                <a:latin typeface="Calibri" panose="020F0502020204030204"/>
+                <a:ea typeface="Calibri" panose="020F0502020204030204"/>
+                <a:cs typeface="Calibri" panose="020F0502020204030204"/>
+                <a:sym typeface="Calibri" panose="020F0502020204030204"/>
               </a:defRPr>
             </a:lvl7pPr>
             <a:lvl8pPr marL="3657600" marR="0" lvl="7" indent="-342900" algn="l" rtl="0">
@@ -10664,16 +10426,16 @@
                 <a:schemeClr val="dk1"/>
               </a:buClr>
               <a:buSzPts val="1800"/>
-              <a:buFont typeface="Arial"/>
+              <a:buFont typeface="Arial" panose="020B0604020202020204"/>
               <a:buChar char="•"/>
               <a:defRPr sz="1800" b="0" i="0" u="none" strike="noStrike" cap="none">
                 <a:solidFill>
                   <a:schemeClr val="dk1"/>
                 </a:solidFill>
-                <a:latin typeface="Calibri"/>
-                <a:ea typeface="Calibri"/>
-                <a:cs typeface="Calibri"/>
-                <a:sym typeface="Calibri"/>
+                <a:latin typeface="Calibri" panose="020F0502020204030204"/>
+                <a:ea typeface="Calibri" panose="020F0502020204030204"/>
+                <a:cs typeface="Calibri" panose="020F0502020204030204"/>
+                <a:sym typeface="Calibri" panose="020F0502020204030204"/>
               </a:defRPr>
             </a:lvl8pPr>
             <a:lvl9pPr marL="4114800" marR="0" lvl="8" indent="-342900" algn="l" rtl="0">
@@ -10690,22 +10452,20 @@
                 <a:schemeClr val="dk1"/>
               </a:buClr>
               <a:buSzPts val="1800"/>
-              <a:buFont typeface="Arial"/>
+              <a:buFont typeface="Arial" panose="020B0604020202020204"/>
               <a:buChar char="•"/>
               <a:defRPr sz="1800" b="0" i="0" u="none" strike="noStrike" cap="none">
                 <a:solidFill>
                   <a:schemeClr val="dk1"/>
                 </a:solidFill>
-                <a:latin typeface="Calibri"/>
-                <a:ea typeface="Calibri"/>
-                <a:cs typeface="Calibri"/>
-                <a:sym typeface="Calibri"/>
+                <a:latin typeface="Calibri" panose="020F0502020204030204"/>
+                <a:ea typeface="Calibri" panose="020F0502020204030204"/>
+                <a:cs typeface="Calibri" panose="020F0502020204030204"/>
+                <a:sym typeface="Calibri" panose="020F0502020204030204"/>
               </a:defRPr>
             </a:lvl9pPr>
           </a:lstStyle>
-          <a:p>
-            <a:endParaRPr/>
-          </a:p>
+          <a:p/>
         </p:txBody>
       </p:sp>
       <p:sp>
@@ -10749,10 +10509,10 @@
                 <a:solidFill>
                   <a:srgbClr val="888888"/>
                 </a:solidFill>
-                <a:latin typeface="Calibri"/>
-                <a:ea typeface="Calibri"/>
-                <a:cs typeface="Calibri"/>
-                <a:sym typeface="Calibri"/>
+                <a:latin typeface="Calibri" panose="020F0502020204030204"/>
+                <a:ea typeface="Calibri" panose="020F0502020204030204"/>
+                <a:cs typeface="Calibri" panose="020F0502020204030204"/>
+                <a:sym typeface="Calibri" panose="020F0502020204030204"/>
               </a:defRPr>
             </a:lvl1pPr>
             <a:lvl2pPr marR="0" lvl="1" algn="l" rtl="0">
@@ -10768,10 +10528,10 @@
                 <a:solidFill>
                   <a:schemeClr val="dk1"/>
                 </a:solidFill>
-                <a:latin typeface="Calibri"/>
-                <a:ea typeface="Calibri"/>
-                <a:cs typeface="Calibri"/>
-                <a:sym typeface="Calibri"/>
+                <a:latin typeface="Calibri" panose="020F0502020204030204"/>
+                <a:ea typeface="Calibri" panose="020F0502020204030204"/>
+                <a:cs typeface="Calibri" panose="020F0502020204030204"/>
+                <a:sym typeface="Calibri" panose="020F0502020204030204"/>
               </a:defRPr>
             </a:lvl2pPr>
             <a:lvl3pPr marR="0" lvl="2" algn="l" rtl="0">
@@ -10787,10 +10547,10 @@
                 <a:solidFill>
                   <a:schemeClr val="dk1"/>
                 </a:solidFill>
-                <a:latin typeface="Calibri"/>
-                <a:ea typeface="Calibri"/>
-                <a:cs typeface="Calibri"/>
-                <a:sym typeface="Calibri"/>
+                <a:latin typeface="Calibri" panose="020F0502020204030204"/>
+                <a:ea typeface="Calibri" panose="020F0502020204030204"/>
+                <a:cs typeface="Calibri" panose="020F0502020204030204"/>
+                <a:sym typeface="Calibri" panose="020F0502020204030204"/>
               </a:defRPr>
             </a:lvl3pPr>
             <a:lvl4pPr marR="0" lvl="3" algn="l" rtl="0">
@@ -10806,10 +10566,10 @@
                 <a:solidFill>
                   <a:schemeClr val="dk1"/>
                 </a:solidFill>
-                <a:latin typeface="Calibri"/>
-                <a:ea typeface="Calibri"/>
-                <a:cs typeface="Calibri"/>
-                <a:sym typeface="Calibri"/>
+                <a:latin typeface="Calibri" panose="020F0502020204030204"/>
+                <a:ea typeface="Calibri" panose="020F0502020204030204"/>
+                <a:cs typeface="Calibri" panose="020F0502020204030204"/>
+                <a:sym typeface="Calibri" panose="020F0502020204030204"/>
               </a:defRPr>
             </a:lvl4pPr>
             <a:lvl5pPr marR="0" lvl="4" algn="l" rtl="0">
@@ -10825,10 +10585,10 @@
                 <a:solidFill>
                   <a:schemeClr val="dk1"/>
                 </a:solidFill>
-                <a:latin typeface="Calibri"/>
-                <a:ea typeface="Calibri"/>
-                <a:cs typeface="Calibri"/>
-                <a:sym typeface="Calibri"/>
+                <a:latin typeface="Calibri" panose="020F0502020204030204"/>
+                <a:ea typeface="Calibri" panose="020F0502020204030204"/>
+                <a:cs typeface="Calibri" panose="020F0502020204030204"/>
+                <a:sym typeface="Calibri" panose="020F0502020204030204"/>
               </a:defRPr>
             </a:lvl5pPr>
             <a:lvl6pPr marR="0" lvl="5" algn="l" rtl="0">
@@ -10844,10 +10604,10 @@
                 <a:solidFill>
                   <a:schemeClr val="dk1"/>
                 </a:solidFill>
-                <a:latin typeface="Calibri"/>
-                <a:ea typeface="Calibri"/>
-                <a:cs typeface="Calibri"/>
-                <a:sym typeface="Calibri"/>
+                <a:latin typeface="Calibri" panose="020F0502020204030204"/>
+                <a:ea typeface="Calibri" panose="020F0502020204030204"/>
+                <a:cs typeface="Calibri" panose="020F0502020204030204"/>
+                <a:sym typeface="Calibri" panose="020F0502020204030204"/>
               </a:defRPr>
             </a:lvl6pPr>
             <a:lvl7pPr marR="0" lvl="6" algn="l" rtl="0">
@@ -10863,10 +10623,10 @@
                 <a:solidFill>
                   <a:schemeClr val="dk1"/>
                 </a:solidFill>
-                <a:latin typeface="Calibri"/>
-                <a:ea typeface="Calibri"/>
-                <a:cs typeface="Calibri"/>
-                <a:sym typeface="Calibri"/>
+                <a:latin typeface="Calibri" panose="020F0502020204030204"/>
+                <a:ea typeface="Calibri" panose="020F0502020204030204"/>
+                <a:cs typeface="Calibri" panose="020F0502020204030204"/>
+                <a:sym typeface="Calibri" panose="020F0502020204030204"/>
               </a:defRPr>
             </a:lvl7pPr>
             <a:lvl8pPr marR="0" lvl="7" algn="l" rtl="0">
@@ -10882,10 +10642,10 @@
                 <a:solidFill>
                   <a:schemeClr val="dk1"/>
                 </a:solidFill>
-                <a:latin typeface="Calibri"/>
-                <a:ea typeface="Calibri"/>
-                <a:cs typeface="Calibri"/>
-                <a:sym typeface="Calibri"/>
+                <a:latin typeface="Calibri" panose="020F0502020204030204"/>
+                <a:ea typeface="Calibri" panose="020F0502020204030204"/>
+                <a:cs typeface="Calibri" panose="020F0502020204030204"/>
+                <a:sym typeface="Calibri" panose="020F0502020204030204"/>
               </a:defRPr>
             </a:lvl8pPr>
             <a:lvl9pPr marR="0" lvl="8" algn="l" rtl="0">
@@ -10901,16 +10661,14 @@
                 <a:solidFill>
                   <a:schemeClr val="dk1"/>
                 </a:solidFill>
-                <a:latin typeface="Calibri"/>
-                <a:ea typeface="Calibri"/>
-                <a:cs typeface="Calibri"/>
-                <a:sym typeface="Calibri"/>
+                <a:latin typeface="Calibri" panose="020F0502020204030204"/>
+                <a:ea typeface="Calibri" panose="020F0502020204030204"/>
+                <a:cs typeface="Calibri" panose="020F0502020204030204"/>
+                <a:sym typeface="Calibri" panose="020F0502020204030204"/>
               </a:defRPr>
             </a:lvl9pPr>
           </a:lstStyle>
-          <a:p>
-            <a:endParaRPr/>
-          </a:p>
+          <a:p/>
         </p:txBody>
       </p:sp>
       <p:sp>
@@ -10954,10 +10712,10 @@
                 <a:solidFill>
                   <a:srgbClr val="888888"/>
                 </a:solidFill>
-                <a:latin typeface="Calibri"/>
-                <a:ea typeface="Calibri"/>
-                <a:cs typeface="Calibri"/>
-                <a:sym typeface="Calibri"/>
+                <a:latin typeface="Calibri" panose="020F0502020204030204"/>
+                <a:ea typeface="Calibri" panose="020F0502020204030204"/>
+                <a:cs typeface="Calibri" panose="020F0502020204030204"/>
+                <a:sym typeface="Calibri" panose="020F0502020204030204"/>
               </a:defRPr>
             </a:lvl1pPr>
             <a:lvl2pPr marR="0" lvl="1" algn="l" rtl="0">
@@ -10973,10 +10731,10 @@
                 <a:solidFill>
                   <a:schemeClr val="dk1"/>
                 </a:solidFill>
-                <a:latin typeface="Calibri"/>
-                <a:ea typeface="Calibri"/>
-                <a:cs typeface="Calibri"/>
-                <a:sym typeface="Calibri"/>
+                <a:latin typeface="Calibri" panose="020F0502020204030204"/>
+                <a:ea typeface="Calibri" panose="020F0502020204030204"/>
+                <a:cs typeface="Calibri" panose="020F0502020204030204"/>
+                <a:sym typeface="Calibri" panose="020F0502020204030204"/>
               </a:defRPr>
             </a:lvl2pPr>
             <a:lvl3pPr marR="0" lvl="2" algn="l" rtl="0">
@@ -10992,10 +10750,10 @@
                 <a:solidFill>
                   <a:schemeClr val="dk1"/>
                 </a:solidFill>
-                <a:latin typeface="Calibri"/>
-                <a:ea typeface="Calibri"/>
-                <a:cs typeface="Calibri"/>
-                <a:sym typeface="Calibri"/>
+                <a:latin typeface="Calibri" panose="020F0502020204030204"/>
+                <a:ea typeface="Calibri" panose="020F0502020204030204"/>
+                <a:cs typeface="Calibri" panose="020F0502020204030204"/>
+                <a:sym typeface="Calibri" panose="020F0502020204030204"/>
               </a:defRPr>
             </a:lvl3pPr>
             <a:lvl4pPr marR="0" lvl="3" algn="l" rtl="0">
@@ -11011,10 +10769,10 @@
                 <a:solidFill>
                   <a:schemeClr val="dk1"/>
                 </a:solidFill>
-                <a:latin typeface="Calibri"/>
-                <a:ea typeface="Calibri"/>
-                <a:cs typeface="Calibri"/>
-                <a:sym typeface="Calibri"/>
+                <a:latin typeface="Calibri" panose="020F0502020204030204"/>
+                <a:ea typeface="Calibri" panose="020F0502020204030204"/>
+                <a:cs typeface="Calibri" panose="020F0502020204030204"/>
+                <a:sym typeface="Calibri" panose="020F0502020204030204"/>
               </a:defRPr>
             </a:lvl4pPr>
             <a:lvl5pPr marR="0" lvl="4" algn="l" rtl="0">
@@ -11030,10 +10788,10 @@
                 <a:solidFill>
                   <a:schemeClr val="dk1"/>
                 </a:solidFill>
-                <a:latin typeface="Calibri"/>
-                <a:ea typeface="Calibri"/>
-                <a:cs typeface="Calibri"/>
-                <a:sym typeface="Calibri"/>
+                <a:latin typeface="Calibri" panose="020F0502020204030204"/>
+                <a:ea typeface="Calibri" panose="020F0502020204030204"/>
+                <a:cs typeface="Calibri" panose="020F0502020204030204"/>
+                <a:sym typeface="Calibri" panose="020F0502020204030204"/>
               </a:defRPr>
             </a:lvl5pPr>
             <a:lvl6pPr marR="0" lvl="5" algn="l" rtl="0">
@@ -11049,10 +10807,10 @@
                 <a:solidFill>
                   <a:schemeClr val="dk1"/>
                 </a:solidFill>
-                <a:latin typeface="Calibri"/>
-                <a:ea typeface="Calibri"/>
-                <a:cs typeface="Calibri"/>
-                <a:sym typeface="Calibri"/>
+                <a:latin typeface="Calibri" panose="020F0502020204030204"/>
+                <a:ea typeface="Calibri" panose="020F0502020204030204"/>
+                <a:cs typeface="Calibri" panose="020F0502020204030204"/>
+                <a:sym typeface="Calibri" panose="020F0502020204030204"/>
               </a:defRPr>
             </a:lvl6pPr>
             <a:lvl7pPr marR="0" lvl="6" algn="l" rtl="0">
@@ -11068,10 +10826,10 @@
                 <a:solidFill>
                   <a:schemeClr val="dk1"/>
                 </a:solidFill>
-                <a:latin typeface="Calibri"/>
-                <a:ea typeface="Calibri"/>
-                <a:cs typeface="Calibri"/>
-                <a:sym typeface="Calibri"/>
+                <a:latin typeface="Calibri" panose="020F0502020204030204"/>
+                <a:ea typeface="Calibri" panose="020F0502020204030204"/>
+                <a:cs typeface="Calibri" panose="020F0502020204030204"/>
+                <a:sym typeface="Calibri" panose="020F0502020204030204"/>
               </a:defRPr>
             </a:lvl7pPr>
             <a:lvl8pPr marR="0" lvl="7" algn="l" rtl="0">
@@ -11087,10 +10845,10 @@
                 <a:solidFill>
                   <a:schemeClr val="dk1"/>
                 </a:solidFill>
-                <a:latin typeface="Calibri"/>
-                <a:ea typeface="Calibri"/>
-                <a:cs typeface="Calibri"/>
-                <a:sym typeface="Calibri"/>
+                <a:latin typeface="Calibri" panose="020F0502020204030204"/>
+                <a:ea typeface="Calibri" panose="020F0502020204030204"/>
+                <a:cs typeface="Calibri" panose="020F0502020204030204"/>
+                <a:sym typeface="Calibri" panose="020F0502020204030204"/>
               </a:defRPr>
             </a:lvl8pPr>
             <a:lvl9pPr marR="0" lvl="8" algn="l" rtl="0">
@@ -11106,16 +10864,14 @@
                 <a:solidFill>
                   <a:schemeClr val="dk1"/>
                 </a:solidFill>
-                <a:latin typeface="Calibri"/>
-                <a:ea typeface="Calibri"/>
-                <a:cs typeface="Calibri"/>
-                <a:sym typeface="Calibri"/>
+                <a:latin typeface="Calibri" panose="020F0502020204030204"/>
+                <a:ea typeface="Calibri" panose="020F0502020204030204"/>
+                <a:cs typeface="Calibri" panose="020F0502020204030204"/>
+                <a:sym typeface="Calibri" panose="020F0502020204030204"/>
               </a:defRPr>
             </a:lvl9pPr>
           </a:lstStyle>
-          <a:p>
-            <a:endParaRPr/>
-          </a:p>
+          <a:p/>
         </p:txBody>
       </p:sp>
       <p:sp>
@@ -11155,10 +10911,10 @@
                 <a:solidFill>
                   <a:srgbClr val="888888"/>
                 </a:solidFill>
-                <a:latin typeface="Calibri"/>
-                <a:ea typeface="Calibri"/>
-                <a:cs typeface="Calibri"/>
-                <a:sym typeface="Calibri"/>
+                <a:latin typeface="Calibri" panose="020F0502020204030204"/>
+                <a:ea typeface="Calibri" panose="020F0502020204030204"/>
+                <a:cs typeface="Calibri" panose="020F0502020204030204"/>
+                <a:sym typeface="Calibri" panose="020F0502020204030204"/>
               </a:defRPr>
             </a:lvl1pPr>
             <a:lvl2pPr marL="0" marR="0" lvl="1" indent="0" algn="r" rtl="0">
@@ -11170,10 +10926,10 @@
                 <a:solidFill>
                   <a:srgbClr val="888888"/>
                 </a:solidFill>
-                <a:latin typeface="Calibri"/>
-                <a:ea typeface="Calibri"/>
-                <a:cs typeface="Calibri"/>
-                <a:sym typeface="Calibri"/>
+                <a:latin typeface="Calibri" panose="020F0502020204030204"/>
+                <a:ea typeface="Calibri" panose="020F0502020204030204"/>
+                <a:cs typeface="Calibri" panose="020F0502020204030204"/>
+                <a:sym typeface="Calibri" panose="020F0502020204030204"/>
               </a:defRPr>
             </a:lvl2pPr>
             <a:lvl3pPr marL="0" marR="0" lvl="2" indent="0" algn="r" rtl="0">
@@ -11185,10 +10941,10 @@
                 <a:solidFill>
                   <a:srgbClr val="888888"/>
                 </a:solidFill>
-                <a:latin typeface="Calibri"/>
-                <a:ea typeface="Calibri"/>
-                <a:cs typeface="Calibri"/>
-                <a:sym typeface="Calibri"/>
+                <a:latin typeface="Calibri" panose="020F0502020204030204"/>
+                <a:ea typeface="Calibri" panose="020F0502020204030204"/>
+                <a:cs typeface="Calibri" panose="020F0502020204030204"/>
+                <a:sym typeface="Calibri" panose="020F0502020204030204"/>
               </a:defRPr>
             </a:lvl3pPr>
             <a:lvl4pPr marL="0" marR="0" lvl="3" indent="0" algn="r" rtl="0">
@@ -11200,10 +10956,10 @@
                 <a:solidFill>
                   <a:srgbClr val="888888"/>
                 </a:solidFill>
-                <a:latin typeface="Calibri"/>
-                <a:ea typeface="Calibri"/>
-                <a:cs typeface="Calibri"/>
-                <a:sym typeface="Calibri"/>
+                <a:latin typeface="Calibri" panose="020F0502020204030204"/>
+                <a:ea typeface="Calibri" panose="020F0502020204030204"/>
+                <a:cs typeface="Calibri" panose="020F0502020204030204"/>
+                <a:sym typeface="Calibri" panose="020F0502020204030204"/>
               </a:defRPr>
             </a:lvl4pPr>
             <a:lvl5pPr marL="0" marR="0" lvl="4" indent="0" algn="r" rtl="0">
@@ -11215,10 +10971,10 @@
                 <a:solidFill>
                   <a:srgbClr val="888888"/>
                 </a:solidFill>
-                <a:latin typeface="Calibri"/>
-                <a:ea typeface="Calibri"/>
-                <a:cs typeface="Calibri"/>
-                <a:sym typeface="Calibri"/>
+                <a:latin typeface="Calibri" panose="020F0502020204030204"/>
+                <a:ea typeface="Calibri" panose="020F0502020204030204"/>
+                <a:cs typeface="Calibri" panose="020F0502020204030204"/>
+                <a:sym typeface="Calibri" panose="020F0502020204030204"/>
               </a:defRPr>
             </a:lvl5pPr>
             <a:lvl6pPr marL="0" marR="0" lvl="5" indent="0" algn="r" rtl="0">
@@ -11230,10 +10986,10 @@
                 <a:solidFill>
                   <a:srgbClr val="888888"/>
                 </a:solidFill>
-                <a:latin typeface="Calibri"/>
-                <a:ea typeface="Calibri"/>
-                <a:cs typeface="Calibri"/>
-                <a:sym typeface="Calibri"/>
+                <a:latin typeface="Calibri" panose="020F0502020204030204"/>
+                <a:ea typeface="Calibri" panose="020F0502020204030204"/>
+                <a:cs typeface="Calibri" panose="020F0502020204030204"/>
+                <a:sym typeface="Calibri" panose="020F0502020204030204"/>
               </a:defRPr>
             </a:lvl6pPr>
             <a:lvl7pPr marL="0" marR="0" lvl="6" indent="0" algn="r" rtl="0">
@@ -11245,10 +11001,10 @@
                 <a:solidFill>
                   <a:srgbClr val="888888"/>
                 </a:solidFill>
-                <a:latin typeface="Calibri"/>
-                <a:ea typeface="Calibri"/>
-                <a:cs typeface="Calibri"/>
-                <a:sym typeface="Calibri"/>
+                <a:latin typeface="Calibri" panose="020F0502020204030204"/>
+                <a:ea typeface="Calibri" panose="020F0502020204030204"/>
+                <a:cs typeface="Calibri" panose="020F0502020204030204"/>
+                <a:sym typeface="Calibri" panose="020F0502020204030204"/>
               </a:defRPr>
             </a:lvl7pPr>
             <a:lvl8pPr marL="0" marR="0" lvl="7" indent="0" algn="r" rtl="0">
@@ -11260,10 +11016,10 @@
                 <a:solidFill>
                   <a:srgbClr val="888888"/>
                 </a:solidFill>
-                <a:latin typeface="Calibri"/>
-                <a:ea typeface="Calibri"/>
-                <a:cs typeface="Calibri"/>
-                <a:sym typeface="Calibri"/>
+                <a:latin typeface="Calibri" panose="020F0502020204030204"/>
+                <a:ea typeface="Calibri" panose="020F0502020204030204"/>
+                <a:cs typeface="Calibri" panose="020F0502020204030204"/>
+                <a:sym typeface="Calibri" panose="020F0502020204030204"/>
               </a:defRPr>
             </a:lvl8pPr>
             <a:lvl9pPr marL="0" marR="0" lvl="8" indent="0" algn="r" rtl="0">
@@ -11275,10 +11031,10 @@
                 <a:solidFill>
                   <a:srgbClr val="888888"/>
                 </a:solidFill>
-                <a:latin typeface="Calibri"/>
-                <a:ea typeface="Calibri"/>
-                <a:cs typeface="Calibri"/>
-                <a:sym typeface="Calibri"/>
+                <a:latin typeface="Calibri" panose="020F0502020204030204"/>
+                <a:ea typeface="Calibri" panose="020F0502020204030204"/>
+                <a:cs typeface="Calibri" panose="020F0502020204030204"/>
+                <a:sym typeface="Calibri" panose="020F0502020204030204"/>
               </a:defRPr>
             </a:lvl9pPr>
           </a:lstStyle>
@@ -11294,18 +11050,8 @@
             </a:pPr>
             <a:fld id="{00000000-1234-1234-1234-123412341234}" type="slidenum">
               <a:rPr lang="en-US"/>
-              <a:pPr marL="0" lvl="0" indent="0" algn="r" rtl="0">
-                <a:spcBef>
-                  <a:spcPts val="0"/>
-                </a:spcBef>
-                <a:spcAft>
-                  <a:spcPts val="0"/>
-                </a:spcAft>
-                <a:buNone/>
-              </a:pPr>
-              <a:t>‹#›</a:t>
             </a:fld>
-            <a:endParaRPr/>
+            <a:endParaRPr lang="en-US"/>
           </a:p>
         </p:txBody>
       </p:sp>
@@ -11352,15 +11098,15 @@
         <a:buClr>
           <a:srgbClr val="000000"/>
         </a:buClr>
-        <a:buFont typeface="Arial"/>
+        <a:buFont typeface="Arial" panose="020B0604020202020204"/>
         <a:defRPr sz="1400" b="0" i="0" u="none" strike="noStrike" cap="none">
           <a:solidFill>
             <a:srgbClr val="000000"/>
           </a:solidFill>
-          <a:latin typeface="Arial"/>
-          <a:ea typeface="Arial"/>
-          <a:cs typeface="Arial"/>
-          <a:sym typeface="Arial"/>
+          <a:latin typeface="Arial" panose="020B0604020202020204"/>
+          <a:ea typeface="Arial" panose="020B0604020202020204"/>
+          <a:cs typeface="Arial" panose="020B0604020202020204"/>
+          <a:sym typeface="Arial" panose="020B0604020202020204"/>
         </a:defRPr>
       </a:lvl1pPr>
       <a:lvl2pPr marR="0" lvl="1" algn="l" rtl="0">
@@ -11376,15 +11122,15 @@
         <a:buClr>
           <a:srgbClr val="000000"/>
         </a:buClr>
-        <a:buFont typeface="Arial"/>
+        <a:buFont typeface="Arial" panose="020B0604020202020204"/>
         <a:defRPr sz="1400" b="0" i="0" u="none" strike="noStrike" cap="none">
           <a:solidFill>
             <a:srgbClr val="000000"/>
           </a:solidFill>
-          <a:latin typeface="Arial"/>
-          <a:ea typeface="Arial"/>
-          <a:cs typeface="Arial"/>
-          <a:sym typeface="Arial"/>
+          <a:latin typeface="Arial" panose="020B0604020202020204"/>
+          <a:ea typeface="Arial" panose="020B0604020202020204"/>
+          <a:cs typeface="Arial" panose="020B0604020202020204"/>
+          <a:sym typeface="Arial" panose="020B0604020202020204"/>
         </a:defRPr>
       </a:lvl2pPr>
       <a:lvl3pPr marR="0" lvl="2" algn="l" rtl="0">
@@ -11400,15 +11146,15 @@
         <a:buClr>
           <a:srgbClr val="000000"/>
         </a:buClr>
-        <a:buFont typeface="Arial"/>
+        <a:buFont typeface="Arial" panose="020B0604020202020204"/>
         <a:defRPr sz="1400" b="0" i="0" u="none" strike="noStrike" cap="none">
           <a:solidFill>
             <a:srgbClr val="000000"/>
           </a:solidFill>
-          <a:latin typeface="Arial"/>
-          <a:ea typeface="Arial"/>
-          <a:cs typeface="Arial"/>
-          <a:sym typeface="Arial"/>
+          <a:latin typeface="Arial" panose="020B0604020202020204"/>
+          <a:ea typeface="Arial" panose="020B0604020202020204"/>
+          <a:cs typeface="Arial" panose="020B0604020202020204"/>
+          <a:sym typeface="Arial" panose="020B0604020202020204"/>
         </a:defRPr>
       </a:lvl3pPr>
       <a:lvl4pPr marR="0" lvl="3" algn="l" rtl="0">
@@ -11424,15 +11170,15 @@
         <a:buClr>
           <a:srgbClr val="000000"/>
         </a:buClr>
-        <a:buFont typeface="Arial"/>
+        <a:buFont typeface="Arial" panose="020B0604020202020204"/>
         <a:defRPr sz="1400" b="0" i="0" u="none" strike="noStrike" cap="none">
           <a:solidFill>
             <a:srgbClr val="000000"/>
           </a:solidFill>
-          <a:latin typeface="Arial"/>
-          <a:ea typeface="Arial"/>
-          <a:cs typeface="Arial"/>
-          <a:sym typeface="Arial"/>
+          <a:latin typeface="Arial" panose="020B0604020202020204"/>
+          <a:ea typeface="Arial" panose="020B0604020202020204"/>
+          <a:cs typeface="Arial" panose="020B0604020202020204"/>
+          <a:sym typeface="Arial" panose="020B0604020202020204"/>
         </a:defRPr>
       </a:lvl4pPr>
       <a:lvl5pPr marR="0" lvl="4" algn="l" rtl="0">
@@ -11448,15 +11194,15 @@
         <a:buClr>
           <a:srgbClr val="000000"/>
         </a:buClr>
-        <a:buFont typeface="Arial"/>
+        <a:buFont typeface="Arial" panose="020B0604020202020204"/>
         <a:defRPr sz="1400" b="0" i="0" u="none" strike="noStrike" cap="none">
           <a:solidFill>
             <a:srgbClr val="000000"/>
           </a:solidFill>
-          <a:latin typeface="Arial"/>
-          <a:ea typeface="Arial"/>
-          <a:cs typeface="Arial"/>
-          <a:sym typeface="Arial"/>
+          <a:latin typeface="Arial" panose="020B0604020202020204"/>
+          <a:ea typeface="Arial" panose="020B0604020202020204"/>
+          <a:cs typeface="Arial" panose="020B0604020202020204"/>
+          <a:sym typeface="Arial" panose="020B0604020202020204"/>
         </a:defRPr>
       </a:lvl5pPr>
       <a:lvl6pPr marR="0" lvl="5" algn="l" rtl="0">
@@ -11472,15 +11218,15 @@
         <a:buClr>
           <a:srgbClr val="000000"/>
         </a:buClr>
-        <a:buFont typeface="Arial"/>
+        <a:buFont typeface="Arial" panose="020B0604020202020204"/>
         <a:defRPr sz="1400" b="0" i="0" u="none" strike="noStrike" cap="none">
           <a:solidFill>
             <a:srgbClr val="000000"/>
           </a:solidFill>
-          <a:latin typeface="Arial"/>
-          <a:ea typeface="Arial"/>
-          <a:cs typeface="Arial"/>
-          <a:sym typeface="Arial"/>
+          <a:latin typeface="Arial" panose="020B0604020202020204"/>
+          <a:ea typeface="Arial" panose="020B0604020202020204"/>
+          <a:cs typeface="Arial" panose="020B0604020202020204"/>
+          <a:sym typeface="Arial" panose="020B0604020202020204"/>
         </a:defRPr>
       </a:lvl6pPr>
       <a:lvl7pPr marR="0" lvl="6" algn="l" rtl="0">
@@ -11496,15 +11242,15 @@
         <a:buClr>
           <a:srgbClr val="000000"/>
         </a:buClr>
-        <a:buFont typeface="Arial"/>
+        <a:buFont typeface="Arial" panose="020B0604020202020204"/>
         <a:defRPr sz="1400" b="0" i="0" u="none" strike="noStrike" cap="none">
           <a:solidFill>
             <a:srgbClr val="000000"/>
           </a:solidFill>
-          <a:latin typeface="Arial"/>
-          <a:ea typeface="Arial"/>
-          <a:cs typeface="Arial"/>
-          <a:sym typeface="Arial"/>
+          <a:latin typeface="Arial" panose="020B0604020202020204"/>
+          <a:ea typeface="Arial" panose="020B0604020202020204"/>
+          <a:cs typeface="Arial" panose="020B0604020202020204"/>
+          <a:sym typeface="Arial" panose="020B0604020202020204"/>
         </a:defRPr>
       </a:lvl7pPr>
       <a:lvl8pPr marR="0" lvl="7" algn="l" rtl="0">
@@ -11520,15 +11266,15 @@
         <a:buClr>
           <a:srgbClr val="000000"/>
         </a:buClr>
-        <a:buFont typeface="Arial"/>
+        <a:buFont typeface="Arial" panose="020B0604020202020204"/>
         <a:defRPr sz="1400" b="0" i="0" u="none" strike="noStrike" cap="none">
           <a:solidFill>
             <a:srgbClr val="000000"/>
           </a:solidFill>
-          <a:latin typeface="Arial"/>
-          <a:ea typeface="Arial"/>
-          <a:cs typeface="Arial"/>
-          <a:sym typeface="Arial"/>
+          <a:latin typeface="Arial" panose="020B0604020202020204"/>
+          <a:ea typeface="Arial" panose="020B0604020202020204"/>
+          <a:cs typeface="Arial" panose="020B0604020202020204"/>
+          <a:sym typeface="Arial" panose="020B0604020202020204"/>
         </a:defRPr>
       </a:lvl8pPr>
       <a:lvl9pPr marR="0" lvl="8" algn="l" rtl="0">
@@ -11544,15 +11290,15 @@
         <a:buClr>
           <a:srgbClr val="000000"/>
         </a:buClr>
-        <a:buFont typeface="Arial"/>
+        <a:buFont typeface="Arial" panose="020B0604020202020204"/>
         <a:defRPr sz="1400" b="0" i="0" u="none" strike="noStrike" cap="none">
           <a:solidFill>
             <a:srgbClr val="000000"/>
           </a:solidFill>
-          <a:latin typeface="Arial"/>
-          <a:ea typeface="Arial"/>
-          <a:cs typeface="Arial"/>
-          <a:sym typeface="Arial"/>
+          <a:latin typeface="Arial" panose="020B0604020202020204"/>
+          <a:ea typeface="Arial" panose="020B0604020202020204"/>
+          <a:cs typeface="Arial" panose="020B0604020202020204"/>
+          <a:sym typeface="Arial" panose="020B0604020202020204"/>
         </a:defRPr>
       </a:lvl9pPr>
     </p:titleStyle>
@@ -11581,15 +11327,15 @@
         <a:buClr>
           <a:srgbClr val="000000"/>
         </a:buClr>
-        <a:buFont typeface="Arial"/>
+        <a:buFont typeface="Arial" panose="020B0604020202020204"/>
         <a:defRPr sz="1400" b="0" i="0" u="none" strike="noStrike" cap="none">
           <a:solidFill>
             <a:srgbClr val="000000"/>
           </a:solidFill>
-          <a:latin typeface="Arial"/>
-          <a:ea typeface="Arial"/>
-          <a:cs typeface="Arial"/>
-          <a:sym typeface="Arial"/>
+          <a:latin typeface="Arial" panose="020B0604020202020204"/>
+          <a:ea typeface="Arial" panose="020B0604020202020204"/>
+          <a:cs typeface="Arial" panose="020B0604020202020204"/>
+          <a:sym typeface="Arial" panose="020B0604020202020204"/>
         </a:defRPr>
       </a:lvl1pPr>
       <a:lvl2pPr marR="0" lvl="1" algn="l" rtl="0">
@@ -11605,15 +11351,15 @@
         <a:buClr>
           <a:srgbClr val="000000"/>
         </a:buClr>
-        <a:buFont typeface="Arial"/>
+        <a:buFont typeface="Arial" panose="020B0604020202020204"/>
         <a:defRPr sz="1400" b="0" i="0" u="none" strike="noStrike" cap="none">
           <a:solidFill>
             <a:srgbClr val="000000"/>
           </a:solidFill>
-          <a:latin typeface="Arial"/>
-          <a:ea typeface="Arial"/>
-          <a:cs typeface="Arial"/>
-          <a:sym typeface="Arial"/>
+          <a:latin typeface="Arial" panose="020B0604020202020204"/>
+          <a:ea typeface="Arial" panose="020B0604020202020204"/>
+          <a:cs typeface="Arial" panose="020B0604020202020204"/>
+          <a:sym typeface="Arial" panose="020B0604020202020204"/>
         </a:defRPr>
       </a:lvl2pPr>
       <a:lvl3pPr marR="0" lvl="2" algn="l" rtl="0">
@@ -11629,15 +11375,15 @@
         <a:buClr>
           <a:srgbClr val="000000"/>
         </a:buClr>
-        <a:buFont typeface="Arial"/>
+        <a:buFont typeface="Arial" panose="020B0604020202020204"/>
         <a:defRPr sz="1400" b="0" i="0" u="none" strike="noStrike" cap="none">
           <a:solidFill>
             <a:srgbClr val="000000"/>
           </a:solidFill>
-          <a:latin typeface="Arial"/>
-          <a:ea typeface="Arial"/>
-          <a:cs typeface="Arial"/>
-          <a:sym typeface="Arial"/>
+          <a:latin typeface="Arial" panose="020B0604020202020204"/>
+          <a:ea typeface="Arial" panose="020B0604020202020204"/>
+          <a:cs typeface="Arial" panose="020B0604020202020204"/>
+          <a:sym typeface="Arial" panose="020B0604020202020204"/>
         </a:defRPr>
       </a:lvl3pPr>
       <a:lvl4pPr marR="0" lvl="3" algn="l" rtl="0">
@@ -11653,15 +11399,15 @@
         <a:buClr>
           <a:srgbClr val="000000"/>
         </a:buClr>
-        <a:buFont typeface="Arial"/>
+        <a:buFont typeface="Arial" panose="020B0604020202020204"/>
         <a:defRPr sz="1400" b="0" i="0" u="none" strike="noStrike" cap="none">
           <a:solidFill>
             <a:srgbClr val="000000"/>
           </a:solidFill>
-          <a:latin typeface="Arial"/>
-          <a:ea typeface="Arial"/>
-          <a:cs typeface="Arial"/>
-          <a:sym typeface="Arial"/>
+          <a:latin typeface="Arial" panose="020B0604020202020204"/>
+          <a:ea typeface="Arial" panose="020B0604020202020204"/>
+          <a:cs typeface="Arial" panose="020B0604020202020204"/>
+          <a:sym typeface="Arial" panose="020B0604020202020204"/>
         </a:defRPr>
       </a:lvl4pPr>
       <a:lvl5pPr marR="0" lvl="4" algn="l" rtl="0">
@@ -11677,15 +11423,15 @@
         <a:buClr>
           <a:srgbClr val="000000"/>
         </a:buClr>
-        <a:buFont typeface="Arial"/>
+        <a:buFont typeface="Arial" panose="020B0604020202020204"/>
         <a:defRPr sz="1400" b="0" i="0" u="none" strike="noStrike" cap="none">
           <a:solidFill>
             <a:srgbClr val="000000"/>
           </a:solidFill>
-          <a:latin typeface="Arial"/>
-          <a:ea typeface="Arial"/>
-          <a:cs typeface="Arial"/>
-          <a:sym typeface="Arial"/>
+          <a:latin typeface="Arial" panose="020B0604020202020204"/>
+          <a:ea typeface="Arial" panose="020B0604020202020204"/>
+          <a:cs typeface="Arial" panose="020B0604020202020204"/>
+          <a:sym typeface="Arial" panose="020B0604020202020204"/>
         </a:defRPr>
       </a:lvl5pPr>
       <a:lvl6pPr marR="0" lvl="5" algn="l" rtl="0">
@@ -11701,15 +11447,15 @@
         <a:buClr>
           <a:srgbClr val="000000"/>
         </a:buClr>
-        <a:buFont typeface="Arial"/>
+        <a:buFont typeface="Arial" panose="020B0604020202020204"/>
         <a:defRPr sz="1400" b="0" i="0" u="none" strike="noStrike" cap="none">
           <a:solidFill>
             <a:srgbClr val="000000"/>
           </a:solidFill>
-          <a:latin typeface="Arial"/>
-          <a:ea typeface="Arial"/>
-          <a:cs typeface="Arial"/>
-          <a:sym typeface="Arial"/>
+          <a:latin typeface="Arial" panose="020B0604020202020204"/>
+          <a:ea typeface="Arial" panose="020B0604020202020204"/>
+          <a:cs typeface="Arial" panose="020B0604020202020204"/>
+          <a:sym typeface="Arial" panose="020B0604020202020204"/>
         </a:defRPr>
       </a:lvl6pPr>
       <a:lvl7pPr marR="0" lvl="6" algn="l" rtl="0">
@@ -11725,15 +11471,15 @@
         <a:buClr>
           <a:srgbClr val="000000"/>
         </a:buClr>
-        <a:buFont typeface="Arial"/>
+        <a:buFont typeface="Arial" panose="020B0604020202020204"/>
         <a:defRPr sz="1400" b="0" i="0" u="none" strike="noStrike" cap="none">
           <a:solidFill>
             <a:srgbClr val="000000"/>
           </a:solidFill>
-          <a:latin typeface="Arial"/>
-          <a:ea typeface="Arial"/>
-          <a:cs typeface="Arial"/>
-          <a:sym typeface="Arial"/>
+          <a:latin typeface="Arial" panose="020B0604020202020204"/>
+          <a:ea typeface="Arial" panose="020B0604020202020204"/>
+          <a:cs typeface="Arial" panose="020B0604020202020204"/>
+          <a:sym typeface="Arial" panose="020B0604020202020204"/>
         </a:defRPr>
       </a:lvl7pPr>
       <a:lvl8pPr marR="0" lvl="7" algn="l" rtl="0">
@@ -11749,15 +11495,15 @@
         <a:buClr>
           <a:srgbClr val="000000"/>
         </a:buClr>
-        <a:buFont typeface="Arial"/>
+        <a:buFont typeface="Arial" panose="020B0604020202020204"/>
         <a:defRPr sz="1400" b="0" i="0" u="none" strike="noStrike" cap="none">
           <a:solidFill>
             <a:srgbClr val="000000"/>
           </a:solidFill>
-          <a:latin typeface="Arial"/>
-          <a:ea typeface="Arial"/>
-          <a:cs typeface="Arial"/>
-          <a:sym typeface="Arial"/>
+          <a:latin typeface="Arial" panose="020B0604020202020204"/>
+          <a:ea typeface="Arial" panose="020B0604020202020204"/>
+          <a:cs typeface="Arial" panose="020B0604020202020204"/>
+          <a:sym typeface="Arial" panose="020B0604020202020204"/>
         </a:defRPr>
       </a:lvl8pPr>
       <a:lvl9pPr marR="0" lvl="8" algn="l" rtl="0">
@@ -11773,15 +11519,15 @@
         <a:buClr>
           <a:srgbClr val="000000"/>
         </a:buClr>
-        <a:buFont typeface="Arial"/>
+        <a:buFont typeface="Arial" panose="020B0604020202020204"/>
         <a:defRPr sz="1400" b="0" i="0" u="none" strike="noStrike" cap="none">
           <a:solidFill>
             <a:srgbClr val="000000"/>
           </a:solidFill>
-          <a:latin typeface="Arial"/>
-          <a:ea typeface="Arial"/>
-          <a:cs typeface="Arial"/>
-          <a:sym typeface="Arial"/>
+          <a:latin typeface="Arial" panose="020B0604020202020204"/>
+          <a:ea typeface="Arial" panose="020B0604020202020204"/>
+          <a:cs typeface="Arial" panose="020B0604020202020204"/>
+          <a:sym typeface="Arial" panose="020B0604020202020204"/>
         </a:defRPr>
       </a:lvl9pPr>
     </p:bodyStyle>
@@ -11810,15 +11556,15 @@
         <a:buClr>
           <a:srgbClr val="000000"/>
         </a:buClr>
-        <a:buFont typeface="Arial"/>
+        <a:buFont typeface="Arial" panose="020B0604020202020204"/>
         <a:defRPr sz="1400" b="0" i="0" u="none" strike="noStrike" cap="none">
           <a:solidFill>
             <a:srgbClr val="000000"/>
           </a:solidFill>
-          <a:latin typeface="Arial"/>
-          <a:ea typeface="Arial"/>
-          <a:cs typeface="Arial"/>
-          <a:sym typeface="Arial"/>
+          <a:latin typeface="Arial" panose="020B0604020202020204"/>
+          <a:ea typeface="Arial" panose="020B0604020202020204"/>
+          <a:cs typeface="Arial" panose="020B0604020202020204"/>
+          <a:sym typeface="Arial" panose="020B0604020202020204"/>
         </a:defRPr>
       </a:lvl1pPr>
       <a:lvl2pPr marR="0" lvl="1" algn="l" rtl="0">
@@ -11834,15 +11580,15 @@
         <a:buClr>
           <a:srgbClr val="000000"/>
         </a:buClr>
-        <a:buFont typeface="Arial"/>
+        <a:buFont typeface="Arial" panose="020B0604020202020204"/>
         <a:defRPr sz="1400" b="0" i="0" u="none" strike="noStrike" cap="none">
           <a:solidFill>
             <a:srgbClr val="000000"/>
           </a:solidFill>
-          <a:latin typeface="Arial"/>
-          <a:ea typeface="Arial"/>
-          <a:cs typeface="Arial"/>
-          <a:sym typeface="Arial"/>
+          <a:latin typeface="Arial" panose="020B0604020202020204"/>
+          <a:ea typeface="Arial" panose="020B0604020202020204"/>
+          <a:cs typeface="Arial" panose="020B0604020202020204"/>
+          <a:sym typeface="Arial" panose="020B0604020202020204"/>
         </a:defRPr>
       </a:lvl2pPr>
       <a:lvl3pPr marR="0" lvl="2" algn="l" rtl="0">
@@ -11858,15 +11604,15 @@
         <a:buClr>
           <a:srgbClr val="000000"/>
         </a:buClr>
-        <a:buFont typeface="Arial"/>
+        <a:buFont typeface="Arial" panose="020B0604020202020204"/>
         <a:defRPr sz="1400" b="0" i="0" u="none" strike="noStrike" cap="none">
           <a:solidFill>
             <a:srgbClr val="000000"/>
           </a:solidFill>
-          <a:latin typeface="Arial"/>
-          <a:ea typeface="Arial"/>
-          <a:cs typeface="Arial"/>
-          <a:sym typeface="Arial"/>
+          <a:latin typeface="Arial" panose="020B0604020202020204"/>
+          <a:ea typeface="Arial" panose="020B0604020202020204"/>
+          <a:cs typeface="Arial" panose="020B0604020202020204"/>
+          <a:sym typeface="Arial" panose="020B0604020202020204"/>
         </a:defRPr>
       </a:lvl3pPr>
       <a:lvl4pPr marR="0" lvl="3" algn="l" rtl="0">
@@ -11882,15 +11628,15 @@
         <a:buClr>
           <a:srgbClr val="000000"/>
         </a:buClr>
-        <a:buFont typeface="Arial"/>
+        <a:buFont typeface="Arial" panose="020B0604020202020204"/>
         <a:defRPr sz="1400" b="0" i="0" u="none" strike="noStrike" cap="none">
           <a:solidFill>
             <a:srgbClr val="000000"/>
           </a:solidFill>
-          <a:latin typeface="Arial"/>
-          <a:ea typeface="Arial"/>
-          <a:cs typeface="Arial"/>
-          <a:sym typeface="Arial"/>
+          <a:latin typeface="Arial" panose="020B0604020202020204"/>
+          <a:ea typeface="Arial" panose="020B0604020202020204"/>
+          <a:cs typeface="Arial" panose="020B0604020202020204"/>
+          <a:sym typeface="Arial" panose="020B0604020202020204"/>
         </a:defRPr>
       </a:lvl4pPr>
       <a:lvl5pPr marR="0" lvl="4" algn="l" rtl="0">
@@ -11906,15 +11652,15 @@
         <a:buClr>
           <a:srgbClr val="000000"/>
         </a:buClr>
-        <a:buFont typeface="Arial"/>
+        <a:buFont typeface="Arial" panose="020B0604020202020204"/>
         <a:defRPr sz="1400" b="0" i="0" u="none" strike="noStrike" cap="none">
           <a:solidFill>
             <a:srgbClr val="000000"/>
           </a:solidFill>
-          <a:latin typeface="Arial"/>
-          <a:ea typeface="Arial"/>
-          <a:cs typeface="Arial"/>
-          <a:sym typeface="Arial"/>
+          <a:latin typeface="Arial" panose="020B0604020202020204"/>
+          <a:ea typeface="Arial" panose="020B0604020202020204"/>
+          <a:cs typeface="Arial" panose="020B0604020202020204"/>
+          <a:sym typeface="Arial" panose="020B0604020202020204"/>
         </a:defRPr>
       </a:lvl5pPr>
       <a:lvl6pPr marR="0" lvl="5" algn="l" rtl="0">
@@ -11930,15 +11676,15 @@
         <a:buClr>
           <a:srgbClr val="000000"/>
         </a:buClr>
-        <a:buFont typeface="Arial"/>
+        <a:buFont typeface="Arial" panose="020B0604020202020204"/>
         <a:defRPr sz="1400" b="0" i="0" u="none" strike="noStrike" cap="none">
           <a:solidFill>
             <a:srgbClr val="000000"/>
           </a:solidFill>
-          <a:latin typeface="Arial"/>
-          <a:ea typeface="Arial"/>
-          <a:cs typeface="Arial"/>
-          <a:sym typeface="Arial"/>
+          <a:latin typeface="Arial" panose="020B0604020202020204"/>
+          <a:ea typeface="Arial" panose="020B0604020202020204"/>
+          <a:cs typeface="Arial" panose="020B0604020202020204"/>
+          <a:sym typeface="Arial" panose="020B0604020202020204"/>
         </a:defRPr>
       </a:lvl6pPr>
       <a:lvl7pPr marR="0" lvl="6" algn="l" rtl="0">
@@ -11954,15 +11700,15 @@
         <a:buClr>
           <a:srgbClr val="000000"/>
         </a:buClr>
-        <a:buFont typeface="Arial"/>
+        <a:buFont typeface="Arial" panose="020B0604020202020204"/>
         <a:defRPr sz="1400" b="0" i="0" u="none" strike="noStrike" cap="none">
           <a:solidFill>
             <a:srgbClr val="000000"/>
           </a:solidFill>
-          <a:latin typeface="Arial"/>
-          <a:ea typeface="Arial"/>
-          <a:cs typeface="Arial"/>
-          <a:sym typeface="Arial"/>
+          <a:latin typeface="Arial" panose="020B0604020202020204"/>
+          <a:ea typeface="Arial" panose="020B0604020202020204"/>
+          <a:cs typeface="Arial" panose="020B0604020202020204"/>
+          <a:sym typeface="Arial" panose="020B0604020202020204"/>
         </a:defRPr>
       </a:lvl7pPr>
       <a:lvl8pPr marR="0" lvl="7" algn="l" rtl="0">
@@ -11978,15 +11724,15 @@
         <a:buClr>
           <a:srgbClr val="000000"/>
         </a:buClr>
-        <a:buFont typeface="Arial"/>
+        <a:buFont typeface="Arial" panose="020B0604020202020204"/>
         <a:defRPr sz="1400" b="0" i="0" u="none" strike="noStrike" cap="none">
           <a:solidFill>
             <a:srgbClr val="000000"/>
           </a:solidFill>
-          <a:latin typeface="Arial"/>
-          <a:ea typeface="Arial"/>
-          <a:cs typeface="Arial"/>
-          <a:sym typeface="Arial"/>
+          <a:latin typeface="Arial" panose="020B0604020202020204"/>
+          <a:ea typeface="Arial" panose="020B0604020202020204"/>
+          <a:cs typeface="Arial" panose="020B0604020202020204"/>
+          <a:sym typeface="Arial" panose="020B0604020202020204"/>
         </a:defRPr>
       </a:lvl8pPr>
       <a:lvl9pPr marR="0" lvl="8" algn="l" rtl="0">
@@ -12002,15 +11748,15 @@
         <a:buClr>
           <a:srgbClr val="000000"/>
         </a:buClr>
-        <a:buFont typeface="Arial"/>
+        <a:buFont typeface="Arial" panose="020B0604020202020204"/>
         <a:defRPr sz="1400" b="0" i="0" u="none" strike="noStrike" cap="none">
           <a:solidFill>
             <a:srgbClr val="000000"/>
           </a:solidFill>
-          <a:latin typeface="Arial"/>
-          <a:ea typeface="Arial"/>
-          <a:cs typeface="Arial"/>
-          <a:sym typeface="Arial"/>
+          <a:latin typeface="Arial" panose="020B0604020202020204"/>
+          <a:ea typeface="Arial" panose="020B0604020202020204"/>
+          <a:cs typeface="Arial" panose="020B0604020202020204"/>
+          <a:sym typeface="Arial" panose="020B0604020202020204"/>
         </a:defRPr>
       </a:lvl9pPr>
     </p:otherStyle>
@@ -12183,7 +11929,7 @@
                 <a:schemeClr val="dk1"/>
               </a:buClr>
               <a:buSzPts val="4400"/>
-              <a:buFont typeface="Calibri"/>
+              <a:buFont typeface="Calibri" panose="020F0502020204030204"/>
               <a:buNone/>
             </a:pPr>
             <a:r>
@@ -12193,7 +11939,7 @@
             <a:br>
               <a:rPr lang="en-US"/>
             </a:br>
-            <a:endParaRPr/>
+            <a:endParaRPr lang="en-US"/>
           </a:p>
         </p:txBody>
       </p:sp>
@@ -12204,11 +11950,11 @@
           <p:nvPr/>
         </p:nvPicPr>
         <p:blipFill rotWithShape="1">
-          <a:blip r:embed="rId3">
-            <a:alphaModFix/>
-          </a:blip>
+          <a:blip r:embed="rId1"/>
           <a:srcRect/>
-          <a:stretch/>
+          <a:stretch>
+            <a:fillRect/>
+          </a:stretch>
         </p:blipFill>
         <p:spPr>
           <a:xfrm>
@@ -12278,9 +12024,6 @@
         </p:spPr>
         <p:txBody>
           <a:bodyPr vert="horz" wrap="square" lIns="91440" tIns="0" rIns="91440" bIns="45720" numCol="1" anchor="ctr" anchorCtr="0" compatLnSpc="1">
-            <a:prstTxWarp prst="textNoShape">
-              <a:avLst/>
-            </a:prstTxWarp>
             <a:spAutoFit/>
           </a:bodyPr>
           <a:lstStyle/>
@@ -12299,7 +12042,6 @@
               <a:buSzTx/>
               <a:buFontTx/>
               <a:buNone/>
-              <a:tabLst/>
             </a:pPr>
             <a:r>
               <a:rPr kumimoji="0" lang="en-US" altLang="en-US" sz="3200" b="1" i="0" u="none" strike="noStrike" cap="none" normalizeH="0" baseline="0" dirty="0">
@@ -12520,7 +12262,7 @@
                 <a:schemeClr val="dk1"/>
               </a:buClr>
               <a:buSzPts val="4400"/>
-              <a:buFont typeface="Calibri"/>
+              <a:buFont typeface="Calibri" panose="020F0502020204030204"/>
               <a:buNone/>
             </a:pPr>
             <a:r>
@@ -12541,11 +12283,11 @@
           <p:nvPr/>
         </p:nvPicPr>
         <p:blipFill rotWithShape="1">
-          <a:blip r:embed="rId3">
-            <a:alphaModFix/>
-          </a:blip>
+          <a:blip r:embed="rId1"/>
           <a:srcRect/>
-          <a:stretch/>
+          <a:stretch>
+            <a:fillRect/>
+          </a:stretch>
         </p:blipFill>
         <p:spPr>
           <a:xfrm>
@@ -12561,25 +12303,6 @@
           </a:ln>
         </p:spPr>
       </p:pic>
-      <p:sp>
-        <p:nvSpPr>
-          <p:cNvPr id="3" name="Text Placeholder 2"/>
-          <p:cNvSpPr>
-            <a:spLocks noGrp="1"/>
-          </p:cNvSpPr>
-          <p:nvPr>
-            <p:ph type="body" idx="1"/>
-          </p:nvPr>
-        </p:nvSpPr>
-        <p:spPr/>
-        <p:txBody>
-          <a:bodyPr/>
-          <a:lstStyle/>
-          <a:p>
-            <a:endParaRPr lang="en-US" dirty="0"/>
-          </a:p>
-        </p:txBody>
-      </p:sp>
       <p:pic>
         <p:nvPicPr>
           <p:cNvPr id="4" name="Picture 3"/>
@@ -12589,7 +12312,7 @@
           <p:nvPr/>
         </p:nvPicPr>
         <p:blipFill>
-          <a:blip r:embed="rId4"/>
+          <a:blip r:embed="rId2"/>
           <a:stretch>
             <a:fillRect/>
           </a:stretch>
@@ -12605,11 +12328,6 @@
         </p:spPr>
       </p:pic>
     </p:spTree>
-    <p:extLst>
-      <p:ext uri="{BB962C8B-B14F-4D97-AF65-F5344CB8AC3E}">
-        <p14:creationId xmlns:p14="http://schemas.microsoft.com/office/powerpoint/2010/main" val="1699351650"/>
-      </p:ext>
-    </p:extLst>
   </p:cSld>
   <p:clrMapOvr>
     <a:masterClrMapping/>
@@ -12677,7 +12395,7 @@
                 <a:schemeClr val="dk1"/>
               </a:buClr>
               <a:buSzPts val="4400"/>
-              <a:buFont typeface="Calibri"/>
+              <a:buFont typeface="Calibri" panose="020F0502020204030204"/>
               <a:buNone/>
             </a:pPr>
             <a:r>
@@ -12698,11 +12416,11 @@
           <p:nvPr/>
         </p:nvPicPr>
         <p:blipFill rotWithShape="1">
-          <a:blip r:embed="rId3">
-            <a:alphaModFix/>
-          </a:blip>
+          <a:blip r:embed="rId1"/>
           <a:srcRect/>
-          <a:stretch/>
+          <a:stretch>
+            <a:fillRect/>
+          </a:stretch>
         </p:blipFill>
         <p:spPr>
           <a:xfrm>
@@ -12746,7 +12464,7 @@
           <p:nvPr/>
         </p:nvPicPr>
         <p:blipFill>
-          <a:blip r:embed="rId4"/>
+          <a:blip r:embed="rId2"/>
           <a:stretch>
             <a:fillRect/>
           </a:stretch>
@@ -12762,11 +12480,6 @@
         </p:spPr>
       </p:pic>
     </p:spTree>
-    <p:extLst>
-      <p:ext uri="{BB962C8B-B14F-4D97-AF65-F5344CB8AC3E}">
-        <p14:creationId xmlns:p14="http://schemas.microsoft.com/office/powerpoint/2010/main" val="2708426846"/>
-      </p:ext>
-    </p:extLst>
   </p:cSld>
   <p:clrMapOvr>
     <a:masterClrMapping/>
@@ -12793,13 +12506,7 @@
       </p:grpSpPr>
       <p:sp>
         <p:nvSpPr>
-          <p:cNvPr id="2" name="Title 1">
-            <a:extLst>
-              <a:ext uri="{FF2B5EF4-FFF2-40B4-BE49-F238E27FC236}">
-                <a16:creationId xmlns:a16="http://schemas.microsoft.com/office/drawing/2014/main" id="{62001CE3-FF1D-09F1-FA8F-7C54B1715ED1}"/>
-              </a:ext>
-            </a:extLst>
-          </p:cNvPr>
+          <p:cNvPr id="2" name="Title 1"/>
           <p:cNvSpPr>
             <a:spLocks noGrp="1"/>
           </p:cNvSpPr>
@@ -12818,13 +12525,7 @@
       </p:sp>
       <p:sp>
         <p:nvSpPr>
-          <p:cNvPr id="3" name="Text Placeholder 2">
-            <a:extLst>
-              <a:ext uri="{FF2B5EF4-FFF2-40B4-BE49-F238E27FC236}">
-                <a16:creationId xmlns:a16="http://schemas.microsoft.com/office/drawing/2014/main" id="{0B0618DB-B4C0-BC1F-5045-1DDA2470A1A2}"/>
-              </a:ext>
-            </a:extLst>
-          </p:cNvPr>
+          <p:cNvPr id="3" name="Text Placeholder 2"/>
           <p:cNvSpPr>
             <a:spLocks noGrp="1"/>
           </p:cNvSpPr>
@@ -12843,20 +12544,14 @@
       </p:sp>
       <p:pic>
         <p:nvPicPr>
-          <p:cNvPr id="7" name="Picture 6">
-            <a:extLst>
-              <a:ext uri="{FF2B5EF4-FFF2-40B4-BE49-F238E27FC236}">
-                <a16:creationId xmlns:a16="http://schemas.microsoft.com/office/drawing/2014/main" id="{015338D7-A9C6-2396-0E42-D0D2E82F7F0A}"/>
-              </a:ext>
-            </a:extLst>
-          </p:cNvPr>
+          <p:cNvPr id="7" name="Picture 6"/>
           <p:cNvPicPr>
             <a:picLocks noChangeAspect="1"/>
           </p:cNvPicPr>
           <p:nvPr/>
         </p:nvPicPr>
         <p:blipFill>
-          <a:blip r:embed="rId2"/>
+          <a:blip r:embed="rId1"/>
           <a:stretch>
             <a:fillRect/>
           </a:stretch>
@@ -12872,11 +12567,6 @@
         </p:spPr>
       </p:pic>
     </p:spTree>
-    <p:extLst>
-      <p:ext uri="{BB962C8B-B14F-4D97-AF65-F5344CB8AC3E}">
-        <p14:creationId xmlns:p14="http://schemas.microsoft.com/office/powerpoint/2010/main" val="3076910020"/>
-      </p:ext>
-    </p:extLst>
   </p:cSld>
   <p:clrMapOvr>
     <a:masterClrMapping/>
@@ -12903,13 +12593,7 @@
       </p:grpSpPr>
       <p:sp>
         <p:nvSpPr>
-          <p:cNvPr id="2" name="Title 1">
-            <a:extLst>
-              <a:ext uri="{FF2B5EF4-FFF2-40B4-BE49-F238E27FC236}">
-                <a16:creationId xmlns:a16="http://schemas.microsoft.com/office/drawing/2014/main" id="{ECB0283F-7C38-1854-1F42-0430277E6431}"/>
-              </a:ext>
-            </a:extLst>
-          </p:cNvPr>
+          <p:cNvPr id="2" name="Title 1"/>
           <p:cNvSpPr>
             <a:spLocks noGrp="1"/>
           </p:cNvSpPr>
@@ -12928,13 +12612,7 @@
       </p:sp>
       <p:sp>
         <p:nvSpPr>
-          <p:cNvPr id="3" name="Text Placeholder 2">
-            <a:extLst>
-              <a:ext uri="{FF2B5EF4-FFF2-40B4-BE49-F238E27FC236}">
-                <a16:creationId xmlns:a16="http://schemas.microsoft.com/office/drawing/2014/main" id="{D7CE2095-1C05-F96C-348E-1B2CBA504168}"/>
-              </a:ext>
-            </a:extLst>
-          </p:cNvPr>
+          <p:cNvPr id="3" name="Text Placeholder 2"/>
           <p:cNvSpPr>
             <a:spLocks noGrp="1"/>
           </p:cNvSpPr>
@@ -12953,20 +12631,14 @@
       </p:sp>
       <p:pic>
         <p:nvPicPr>
-          <p:cNvPr id="5" name="Picture 4">
-            <a:extLst>
-              <a:ext uri="{FF2B5EF4-FFF2-40B4-BE49-F238E27FC236}">
-                <a16:creationId xmlns:a16="http://schemas.microsoft.com/office/drawing/2014/main" id="{A4904777-32E0-58F2-1F1E-356619CCF179}"/>
-              </a:ext>
-            </a:extLst>
-          </p:cNvPr>
+          <p:cNvPr id="5" name="Picture 4"/>
           <p:cNvPicPr>
             <a:picLocks noChangeAspect="1"/>
           </p:cNvPicPr>
           <p:nvPr/>
         </p:nvPicPr>
         <p:blipFill>
-          <a:blip r:embed="rId2"/>
+          <a:blip r:embed="rId1"/>
           <a:stretch>
             <a:fillRect/>
           </a:stretch>
@@ -12982,11 +12654,6 @@
         </p:spPr>
       </p:pic>
     </p:spTree>
-    <p:extLst>
-      <p:ext uri="{BB962C8B-B14F-4D97-AF65-F5344CB8AC3E}">
-        <p14:creationId xmlns:p14="http://schemas.microsoft.com/office/powerpoint/2010/main" val="1133437170"/>
-      </p:ext>
-    </p:extLst>
   </p:cSld>
   <p:clrMapOvr>
     <a:masterClrMapping/>
@@ -13054,7 +12721,7 @@
                 <a:schemeClr val="dk1"/>
               </a:buClr>
               <a:buSzPct val="100000"/>
-              <a:buFont typeface="Calibri"/>
+              <a:buFont typeface="Calibri" panose="020F0502020204030204"/>
               <a:buNone/>
             </a:pPr>
             <a:r>
@@ -13278,7 +12945,7 @@
                 <a:schemeClr val="dk1"/>
               </a:buClr>
               <a:buSzPct val="100000"/>
-              <a:buFont typeface="Calibri"/>
+              <a:buFont typeface="Calibri" panose="020F0502020204030204"/>
               <a:buNone/>
             </a:pPr>
             <a:r>
@@ -13300,13 +12967,7 @@
           <p:cNvGraphicFramePr>
             <a:graphicFrameLocks noChangeAspect="1"/>
           </p:cNvGraphicFramePr>
-          <p:nvPr>
-            <p:extLst>
-              <p:ext uri="{D42A27DB-BD31-4B8C-83A1-F6EECF244321}">
-                <p14:modId xmlns:p14="http://schemas.microsoft.com/office/powerpoint/2010/main" val="978504851"/>
-              </p:ext>
-            </p:extLst>
-          </p:nvPr>
+          <p:nvPr/>
         </p:nvGraphicFramePr>
         <p:xfrm>
           <a:off x="152400" y="1295400"/>
@@ -13316,12 +12977,12 @@
           <a:graphicData uri="http://schemas.openxmlformats.org/presentationml/2006/ole">
             <mc:AlternateContent xmlns:mc="http://schemas.openxmlformats.org/markup-compatibility/2006">
               <mc:Choice xmlns:v="urn:schemas-microsoft-com:vml" Requires="v">
-                <p:oleObj name="Document" r:id="rId3" imgW="5956042" imgH="3651302" progId="Word.Document.12">
+                <p:oleObj spid="_x0000_s2" name="Document" r:id="rId1" imgW="5947410" imgH="3646805" progId="Word.Document.12">
                   <p:embed/>
                 </p:oleObj>
               </mc:Choice>
               <mc:Fallback>
-                <p:oleObj name="Document" r:id="rId3" imgW="5956042" imgH="3651302" progId="Word.Document.12">
+                <p:oleObj name="Document" r:id="rId1" imgW="5947410" imgH="3646805" progId="Word.Document.12">
                   <p:embed/>
                   <p:pic>
                     <p:nvPicPr>
@@ -13332,7 +12993,7 @@
                       <p:nvPr/>
                     </p:nvPicPr>
                     <p:blipFill>
-                      <a:blip r:embed="rId4">
+                      <a:blip r:embed="rId2">
                         <a:extLst>
                           <a:ext uri="{28A0092B-C50C-407E-A947-70E740481C1C}">
                             <a14:useLocalDpi xmlns:a14="http://schemas.microsoft.com/office/drawing/2010/main" val="0"/>
@@ -13371,11 +13032,6 @@
         </a:graphic>
       </p:graphicFrame>
     </p:spTree>
-    <p:extLst>
-      <p:ext uri="{BB962C8B-B14F-4D97-AF65-F5344CB8AC3E}">
-        <p14:creationId xmlns:p14="http://schemas.microsoft.com/office/powerpoint/2010/main" val="1603134956"/>
-      </p:ext>
-    </p:extLst>
   </p:cSld>
   <p:clrMapOvr>
     <a:masterClrMapping/>
@@ -13443,7 +13099,7 @@
                 <a:schemeClr val="dk1"/>
               </a:buClr>
               <a:buSzPct val="100000"/>
-              <a:buFont typeface="Calibri"/>
+              <a:buFont typeface="Calibri" panose="020F0502020204030204"/>
               <a:buNone/>
             </a:pPr>
             <a:r>
@@ -13468,7 +13124,7 @@
           <p:nvPr/>
         </p:nvPicPr>
         <p:blipFill>
-          <a:blip r:embed="rId3"/>
+          <a:blip r:embed="rId1"/>
           <a:stretch>
             <a:fillRect/>
           </a:stretch>
@@ -13484,11 +13140,6 @@
         </p:spPr>
       </p:pic>
     </p:spTree>
-    <p:extLst>
-      <p:ext uri="{BB962C8B-B14F-4D97-AF65-F5344CB8AC3E}">
-        <p14:creationId xmlns:p14="http://schemas.microsoft.com/office/powerpoint/2010/main" val="3354455362"/>
-      </p:ext>
-    </p:extLst>
   </p:cSld>
   <p:clrMapOvr>
     <a:masterClrMapping/>
@@ -13556,7 +13207,7 @@
                 <a:schemeClr val="dk1"/>
               </a:buClr>
               <a:buSzPts val="4400"/>
-              <a:buFont typeface="Calibri"/>
+              <a:buFont typeface="Calibri" panose="020F0502020204030204"/>
               <a:buNone/>
             </a:pPr>
             <a:r>
@@ -13566,7 +13217,7 @@
             <a:br>
               <a:rPr lang="en-US"/>
             </a:br>
-            <a:endParaRPr/>
+            <a:endParaRPr lang="en-US"/>
           </a:p>
         </p:txBody>
       </p:sp>
@@ -13726,7 +13377,7 @@
                 <a:schemeClr val="dk1"/>
               </a:buClr>
               <a:buSzPts val="4400"/>
-              <a:buFont typeface="Calibri"/>
+              <a:buFont typeface="Calibri" panose="020F0502020204030204"/>
               <a:buNone/>
             </a:pPr>
             <a:r>
@@ -13774,7 +13425,7 @@
           <p:nvPr/>
         </p:nvPicPr>
         <p:blipFill>
-          <a:blip r:embed="rId3"/>
+          <a:blip r:embed="rId1"/>
           <a:stretch>
             <a:fillRect/>
           </a:stretch>
@@ -13816,13 +13467,7 @@
       </p:grpSpPr>
       <p:sp>
         <p:nvSpPr>
-          <p:cNvPr id="2" name="Title 1">
-            <a:extLst>
-              <a:ext uri="{FF2B5EF4-FFF2-40B4-BE49-F238E27FC236}">
-                <a16:creationId xmlns:a16="http://schemas.microsoft.com/office/drawing/2014/main" id="{008E2597-A31B-F5C3-23BD-8E183CF9C3F9}"/>
-              </a:ext>
-            </a:extLst>
-          </p:cNvPr>
+          <p:cNvPr id="2" name="Title 1"/>
           <p:cNvSpPr>
             <a:spLocks noGrp="1"/>
           </p:cNvSpPr>
@@ -13844,18 +13489,13 @@
               <a:rPr lang="en-US" dirty="0"/>
               <a:t>The Hook – An Everyday Story</a:t>
             </a:r>
+            <a:endParaRPr lang="en-US" dirty="0"/>
           </a:p>
         </p:txBody>
       </p:sp>
       <p:sp>
         <p:nvSpPr>
-          <p:cNvPr id="3" name="Text Placeholder 2">
-            <a:extLst>
-              <a:ext uri="{FF2B5EF4-FFF2-40B4-BE49-F238E27FC236}">
-                <a16:creationId xmlns:a16="http://schemas.microsoft.com/office/drawing/2014/main" id="{032C9CD5-5E80-C8FB-BC16-3ECD1E83B031}"/>
-              </a:ext>
-            </a:extLst>
-          </p:cNvPr>
+          <p:cNvPr id="3" name="Text Placeholder 2"/>
           <p:cNvSpPr>
             <a:spLocks noGrp="1"/>
           </p:cNvSpPr>
@@ -13874,20 +13514,14 @@
       </p:sp>
       <p:pic>
         <p:nvPicPr>
-          <p:cNvPr id="5" name="Picture 4">
-            <a:extLst>
-              <a:ext uri="{FF2B5EF4-FFF2-40B4-BE49-F238E27FC236}">
-                <a16:creationId xmlns:a16="http://schemas.microsoft.com/office/drawing/2014/main" id="{C0D348DF-7B1E-97FA-1038-95AF28B6BC30}"/>
-              </a:ext>
-            </a:extLst>
-          </p:cNvPr>
+          <p:cNvPr id="5" name="Picture 4"/>
           <p:cNvPicPr>
             <a:picLocks noChangeAspect="1"/>
           </p:cNvPicPr>
           <p:nvPr/>
         </p:nvPicPr>
         <p:blipFill>
-          <a:blip r:embed="rId2"/>
+          <a:blip r:embed="rId1"/>
           <a:stretch>
             <a:fillRect/>
           </a:stretch>
@@ -13903,11 +13537,6 @@
         </p:spPr>
       </p:pic>
     </p:spTree>
-    <p:extLst>
-      <p:ext uri="{BB962C8B-B14F-4D97-AF65-F5344CB8AC3E}">
-        <p14:creationId xmlns:p14="http://schemas.microsoft.com/office/powerpoint/2010/main" val="3368259142"/>
-      </p:ext>
-    </p:extLst>
   </p:cSld>
   <p:clrMapOvr>
     <a:masterClrMapping/>
@@ -13958,6 +13587,9 @@
               </a:rPr>
               <a:t>Well-known Heuristic Algorithms</a:t>
             </a:r>
+            <a:endParaRPr lang="en-US" b="1" dirty="0">
+              <a:latin typeface="+mj-lt"/>
+            </a:endParaRPr>
           </a:p>
         </p:txBody>
       </p:sp>
@@ -13989,7 +13621,7 @@
           <p:nvPr/>
         </p:nvPicPr>
         <p:blipFill>
-          <a:blip r:embed="rId2"/>
+          <a:blip r:embed="rId1"/>
           <a:stretch>
             <a:fillRect/>
           </a:stretch>
@@ -14013,7 +13645,7 @@
           <p:nvPr/>
         </p:nvPicPr>
         <p:blipFill>
-          <a:blip r:embed="rId3"/>
+          <a:blip r:embed="rId2"/>
           <a:stretch>
             <a:fillRect/>
           </a:stretch>
@@ -14029,11 +13661,6 @@
         </p:spPr>
       </p:pic>
     </p:spTree>
-    <p:extLst>
-      <p:ext uri="{BB962C8B-B14F-4D97-AF65-F5344CB8AC3E}">
-        <p14:creationId xmlns:p14="http://schemas.microsoft.com/office/powerpoint/2010/main" val="2667141036"/>
-      </p:ext>
-    </p:extLst>
   </p:cSld>
   <p:clrMapOvr>
     <a:masterClrMapping/>
@@ -14082,6 +13709,7 @@
               <a:rPr lang="en-US" dirty="0"/>
               <a:t>A* Search with example</a:t>
             </a:r>
+            <a:endParaRPr lang="en-US" dirty="0"/>
           </a:p>
         </p:txBody>
       </p:sp>
@@ -14106,20 +13734,14 @@
       </p:sp>
       <p:pic>
         <p:nvPicPr>
-          <p:cNvPr id="8" name="Picture 7">
-            <a:extLst>
-              <a:ext uri="{FF2B5EF4-FFF2-40B4-BE49-F238E27FC236}">
-                <a16:creationId xmlns:a16="http://schemas.microsoft.com/office/drawing/2014/main" id="{A71415A1-A3BE-B4AD-7C77-791AA18A1284}"/>
-              </a:ext>
-            </a:extLst>
-          </p:cNvPr>
+          <p:cNvPr id="8" name="Picture 7"/>
           <p:cNvPicPr>
             <a:picLocks noChangeAspect="1"/>
           </p:cNvPicPr>
           <p:nvPr/>
         </p:nvPicPr>
         <p:blipFill>
-          <a:blip r:embed="rId2"/>
+          <a:blip r:embed="rId1"/>
           <a:stretch>
             <a:fillRect/>
           </a:stretch>
@@ -14135,11 +13757,6 @@
         </p:spPr>
       </p:pic>
     </p:spTree>
-    <p:extLst>
-      <p:ext uri="{BB962C8B-B14F-4D97-AF65-F5344CB8AC3E}">
-        <p14:creationId xmlns:p14="http://schemas.microsoft.com/office/powerpoint/2010/main" val="3337202770"/>
-      </p:ext>
-    </p:extLst>
   </p:cSld>
   <p:clrMapOvr>
     <a:masterClrMapping/>
@@ -14152,13 +13769,7 @@
   <p:cSld>
     <p:spTree>
       <p:nvGrpSpPr>
-        <p:cNvPr id="1" name="">
-          <a:extLst>
-            <a:ext uri="{FF2B5EF4-FFF2-40B4-BE49-F238E27FC236}">
-              <a16:creationId xmlns:a16="http://schemas.microsoft.com/office/drawing/2014/main" id="{9DC1539A-340C-398E-AACF-45C7513AC403}"/>
-            </a:ext>
-          </a:extLst>
-        </p:cNvPr>
+        <p:cNvPr id="1" name=""/>
         <p:cNvGrpSpPr/>
         <p:nvPr/>
       </p:nvGrpSpPr>
@@ -14172,13 +13783,7 @@
       </p:grpSpPr>
       <p:sp>
         <p:nvSpPr>
-          <p:cNvPr id="2" name="Title 1">
-            <a:extLst>
-              <a:ext uri="{FF2B5EF4-FFF2-40B4-BE49-F238E27FC236}">
-                <a16:creationId xmlns:a16="http://schemas.microsoft.com/office/drawing/2014/main" id="{72522B29-F5E7-5118-0E7C-D5A7232F9C0B}"/>
-              </a:ext>
-            </a:extLst>
-          </p:cNvPr>
+          <p:cNvPr id="2" name="Title 1"/>
           <p:cNvSpPr>
             <a:spLocks noGrp="1"/>
           </p:cNvSpPr>
@@ -14200,18 +13805,13 @@
               <a:rPr lang="en-US" dirty="0"/>
               <a:t>A* Search with example</a:t>
             </a:r>
+            <a:endParaRPr lang="en-US" dirty="0"/>
           </a:p>
         </p:txBody>
       </p:sp>
       <p:sp>
         <p:nvSpPr>
-          <p:cNvPr id="3" name="Text Placeholder 2">
-            <a:extLst>
-              <a:ext uri="{FF2B5EF4-FFF2-40B4-BE49-F238E27FC236}">
-                <a16:creationId xmlns:a16="http://schemas.microsoft.com/office/drawing/2014/main" id="{5E55EAE6-4F30-FD9E-FD2C-81877BCC5C14}"/>
-              </a:ext>
-            </a:extLst>
-          </p:cNvPr>
+          <p:cNvPr id="3" name="Text Placeholder 2"/>
           <p:cNvSpPr>
             <a:spLocks noGrp="1"/>
           </p:cNvSpPr>
@@ -14230,20 +13830,14 @@
       </p:sp>
       <p:pic>
         <p:nvPicPr>
-          <p:cNvPr id="5" name="Picture 4">
-            <a:extLst>
-              <a:ext uri="{FF2B5EF4-FFF2-40B4-BE49-F238E27FC236}">
-                <a16:creationId xmlns:a16="http://schemas.microsoft.com/office/drawing/2014/main" id="{82CE6EC8-ADC0-9021-A722-B7E7F42778C2}"/>
-              </a:ext>
-            </a:extLst>
-          </p:cNvPr>
+          <p:cNvPr id="5" name="Picture 4"/>
           <p:cNvPicPr>
             <a:picLocks noChangeAspect="1"/>
           </p:cNvPicPr>
           <p:nvPr/>
         </p:nvPicPr>
         <p:blipFill>
-          <a:blip r:embed="rId2"/>
+          <a:blip r:embed="rId1"/>
           <a:stretch>
             <a:fillRect/>
           </a:stretch>
@@ -14259,11 +13853,6 @@
         </p:spPr>
       </p:pic>
     </p:spTree>
-    <p:extLst>
-      <p:ext uri="{BB962C8B-B14F-4D97-AF65-F5344CB8AC3E}">
-        <p14:creationId xmlns:p14="http://schemas.microsoft.com/office/powerpoint/2010/main" val="1784996136"/>
-      </p:ext>
-    </p:extLst>
   </p:cSld>
   <p:clrMapOvr>
     <a:masterClrMapping/>
@@ -14276,13 +13865,7 @@
   <p:cSld>
     <p:spTree>
       <p:nvGrpSpPr>
-        <p:cNvPr id="1" name="">
-          <a:extLst>
-            <a:ext uri="{FF2B5EF4-FFF2-40B4-BE49-F238E27FC236}">
-              <a16:creationId xmlns:a16="http://schemas.microsoft.com/office/drawing/2014/main" id="{EA6973D8-37E2-0415-6481-C76752261575}"/>
-            </a:ext>
-          </a:extLst>
-        </p:cNvPr>
+        <p:cNvPr id="1" name=""/>
         <p:cNvGrpSpPr/>
         <p:nvPr/>
       </p:nvGrpSpPr>
@@ -14296,13 +13879,7 @@
       </p:grpSpPr>
       <p:sp>
         <p:nvSpPr>
-          <p:cNvPr id="2" name="Title 1">
-            <a:extLst>
-              <a:ext uri="{FF2B5EF4-FFF2-40B4-BE49-F238E27FC236}">
-                <a16:creationId xmlns:a16="http://schemas.microsoft.com/office/drawing/2014/main" id="{3E242450-A9BC-AB1D-CC12-255A383ADA6E}"/>
-              </a:ext>
-            </a:extLst>
-          </p:cNvPr>
+          <p:cNvPr id="2" name="Title 1"/>
           <p:cNvSpPr>
             <a:spLocks noGrp="1"/>
           </p:cNvSpPr>
@@ -14324,18 +13901,13 @@
               <a:rPr lang="en-US" dirty="0"/>
               <a:t>A* Search with example</a:t>
             </a:r>
+            <a:endParaRPr lang="en-US" dirty="0"/>
           </a:p>
         </p:txBody>
       </p:sp>
       <p:sp>
         <p:nvSpPr>
-          <p:cNvPr id="3" name="Text Placeholder 2">
-            <a:extLst>
-              <a:ext uri="{FF2B5EF4-FFF2-40B4-BE49-F238E27FC236}">
-                <a16:creationId xmlns:a16="http://schemas.microsoft.com/office/drawing/2014/main" id="{A0E9A906-99FF-1E3F-F5F6-265A40B15070}"/>
-              </a:ext>
-            </a:extLst>
-          </p:cNvPr>
+          <p:cNvPr id="3" name="Text Placeholder 2"/>
           <p:cNvSpPr>
             <a:spLocks noGrp="1"/>
           </p:cNvSpPr>
@@ -14354,20 +13926,14 @@
       </p:sp>
       <p:pic>
         <p:nvPicPr>
-          <p:cNvPr id="6" name="Picture 5">
-            <a:extLst>
-              <a:ext uri="{FF2B5EF4-FFF2-40B4-BE49-F238E27FC236}">
-                <a16:creationId xmlns:a16="http://schemas.microsoft.com/office/drawing/2014/main" id="{312679ED-9F3F-0B22-659C-E3E258F1D75D}"/>
-              </a:ext>
-            </a:extLst>
-          </p:cNvPr>
+          <p:cNvPr id="6" name="Picture 5"/>
           <p:cNvPicPr>
             <a:picLocks noChangeAspect="1"/>
           </p:cNvPicPr>
           <p:nvPr/>
         </p:nvPicPr>
         <p:blipFill>
-          <a:blip r:embed="rId2"/>
+          <a:blip r:embed="rId1"/>
           <a:stretch>
             <a:fillRect/>
           </a:stretch>
@@ -14384,20 +13950,14 @@
       </p:pic>
       <p:pic>
         <p:nvPicPr>
-          <p:cNvPr id="8" name="Picture 7">
-            <a:extLst>
-              <a:ext uri="{FF2B5EF4-FFF2-40B4-BE49-F238E27FC236}">
-                <a16:creationId xmlns:a16="http://schemas.microsoft.com/office/drawing/2014/main" id="{34AA7232-67A5-65E4-9C26-E36FD461BC9D}"/>
-              </a:ext>
-            </a:extLst>
-          </p:cNvPr>
+          <p:cNvPr id="8" name="Picture 7"/>
           <p:cNvPicPr>
             <a:picLocks noChangeAspect="1"/>
           </p:cNvPicPr>
           <p:nvPr/>
         </p:nvPicPr>
         <p:blipFill>
-          <a:blip r:embed="rId3"/>
+          <a:blip r:embed="rId2"/>
           <a:stretch>
             <a:fillRect/>
           </a:stretch>
@@ -14413,11 +13973,6 @@
         </p:spPr>
       </p:pic>
     </p:spTree>
-    <p:extLst>
-      <p:ext uri="{BB962C8B-B14F-4D97-AF65-F5344CB8AC3E}">
-        <p14:creationId xmlns:p14="http://schemas.microsoft.com/office/powerpoint/2010/main" val="747720817"/>
-      </p:ext>
-    </p:extLst>
   </p:cSld>
   <p:clrMapOvr>
     <a:masterClrMapping/>
@@ -14430,13 +13985,7 @@
   <p:cSld>
     <p:spTree>
       <p:nvGrpSpPr>
-        <p:cNvPr id="1" name="">
-          <a:extLst>
-            <a:ext uri="{FF2B5EF4-FFF2-40B4-BE49-F238E27FC236}">
-              <a16:creationId xmlns:a16="http://schemas.microsoft.com/office/drawing/2014/main" id="{C00139B9-7B2A-FDAE-47C1-316DCA2D13BC}"/>
-            </a:ext>
-          </a:extLst>
-        </p:cNvPr>
+        <p:cNvPr id="1" name=""/>
         <p:cNvGrpSpPr/>
         <p:nvPr/>
       </p:nvGrpSpPr>
@@ -14450,13 +13999,7 @@
       </p:grpSpPr>
       <p:sp>
         <p:nvSpPr>
-          <p:cNvPr id="2" name="Title 1">
-            <a:extLst>
-              <a:ext uri="{FF2B5EF4-FFF2-40B4-BE49-F238E27FC236}">
-                <a16:creationId xmlns:a16="http://schemas.microsoft.com/office/drawing/2014/main" id="{7293971E-55C8-9BB3-F0B3-F3879161139E}"/>
-              </a:ext>
-            </a:extLst>
-          </p:cNvPr>
+          <p:cNvPr id="2" name="Title 1"/>
           <p:cNvSpPr>
             <a:spLocks noGrp="1"/>
           </p:cNvSpPr>
@@ -14478,18 +14021,13 @@
               <a:rPr lang="en-US" dirty="0"/>
               <a:t>A* Search with example</a:t>
             </a:r>
+            <a:endParaRPr lang="en-US" dirty="0"/>
           </a:p>
         </p:txBody>
       </p:sp>
       <p:sp>
         <p:nvSpPr>
-          <p:cNvPr id="3" name="Text Placeholder 2">
-            <a:extLst>
-              <a:ext uri="{FF2B5EF4-FFF2-40B4-BE49-F238E27FC236}">
-                <a16:creationId xmlns:a16="http://schemas.microsoft.com/office/drawing/2014/main" id="{046FBB80-14FD-0F63-4C6F-556A3F92D5B6}"/>
-              </a:ext>
-            </a:extLst>
-          </p:cNvPr>
+          <p:cNvPr id="3" name="Text Placeholder 2"/>
           <p:cNvSpPr>
             <a:spLocks noGrp="1"/>
           </p:cNvSpPr>
@@ -14508,20 +14046,14 @@
       </p:sp>
       <p:pic>
         <p:nvPicPr>
-          <p:cNvPr id="5" name="Picture 4">
-            <a:extLst>
-              <a:ext uri="{FF2B5EF4-FFF2-40B4-BE49-F238E27FC236}">
-                <a16:creationId xmlns:a16="http://schemas.microsoft.com/office/drawing/2014/main" id="{2518D5CF-5E0C-52C9-7AD1-2B6C91EB8E67}"/>
-              </a:ext>
-            </a:extLst>
-          </p:cNvPr>
+          <p:cNvPr id="5" name="Picture 4"/>
           <p:cNvPicPr>
             <a:picLocks noChangeAspect="1"/>
           </p:cNvPicPr>
           <p:nvPr/>
         </p:nvPicPr>
         <p:blipFill>
-          <a:blip r:embed="rId2"/>
+          <a:blip r:embed="rId1"/>
           <a:stretch>
             <a:fillRect/>
           </a:stretch>
@@ -14537,11 +14069,6 @@
         </p:spPr>
       </p:pic>
     </p:spTree>
-    <p:extLst>
-      <p:ext uri="{BB962C8B-B14F-4D97-AF65-F5344CB8AC3E}">
-        <p14:creationId xmlns:p14="http://schemas.microsoft.com/office/powerpoint/2010/main" val="28742589"/>
-      </p:ext>
-    </p:extLst>
   </p:cSld>
   <p:clrMapOvr>
     <a:masterClrMapping/>
@@ -14554,13 +14081,7 @@
   <p:cSld>
     <p:spTree>
       <p:nvGrpSpPr>
-        <p:cNvPr id="1" name="">
-          <a:extLst>
-            <a:ext uri="{FF2B5EF4-FFF2-40B4-BE49-F238E27FC236}">
-              <a16:creationId xmlns:a16="http://schemas.microsoft.com/office/drawing/2014/main" id="{004DE606-0051-EC17-843E-C6800F1391C8}"/>
-            </a:ext>
-          </a:extLst>
-        </p:cNvPr>
+        <p:cNvPr id="1" name=""/>
         <p:cNvGrpSpPr/>
         <p:nvPr/>
       </p:nvGrpSpPr>
@@ -14574,13 +14095,7 @@
       </p:grpSpPr>
       <p:sp>
         <p:nvSpPr>
-          <p:cNvPr id="2" name="Title 1">
-            <a:extLst>
-              <a:ext uri="{FF2B5EF4-FFF2-40B4-BE49-F238E27FC236}">
-                <a16:creationId xmlns:a16="http://schemas.microsoft.com/office/drawing/2014/main" id="{B3824CC0-ACF7-6D39-2216-BE2BB374FC37}"/>
-              </a:ext>
-            </a:extLst>
-          </p:cNvPr>
+          <p:cNvPr id="2" name="Title 1"/>
           <p:cNvSpPr>
             <a:spLocks noGrp="1"/>
           </p:cNvSpPr>
@@ -14597,18 +14112,13 @@
               <a:rPr lang="en-US" dirty="0"/>
               <a:t>A* Search with example</a:t>
             </a:r>
+            <a:endParaRPr lang="en-US" dirty="0"/>
           </a:p>
         </p:txBody>
       </p:sp>
       <p:sp>
         <p:nvSpPr>
-          <p:cNvPr id="3" name="Text Placeholder 2">
-            <a:extLst>
-              <a:ext uri="{FF2B5EF4-FFF2-40B4-BE49-F238E27FC236}">
-                <a16:creationId xmlns:a16="http://schemas.microsoft.com/office/drawing/2014/main" id="{16BD5978-520F-DC27-A72B-7607D8E35433}"/>
-              </a:ext>
-            </a:extLst>
-          </p:cNvPr>
+          <p:cNvPr id="3" name="Text Placeholder 2"/>
           <p:cNvSpPr>
             <a:spLocks noGrp="1"/>
           </p:cNvSpPr>
@@ -14627,20 +14137,14 @@
       </p:sp>
       <p:pic>
         <p:nvPicPr>
-          <p:cNvPr id="4" name="Picture 3">
-            <a:extLst>
-              <a:ext uri="{FF2B5EF4-FFF2-40B4-BE49-F238E27FC236}">
-                <a16:creationId xmlns:a16="http://schemas.microsoft.com/office/drawing/2014/main" id="{B8636D2F-6606-2613-6567-59F3CEC92922}"/>
-              </a:ext>
-            </a:extLst>
-          </p:cNvPr>
+          <p:cNvPr id="4" name="Picture 3"/>
           <p:cNvPicPr>
             <a:picLocks noChangeAspect="1"/>
           </p:cNvPicPr>
           <p:nvPr/>
         </p:nvPicPr>
         <p:blipFill>
-          <a:blip r:embed="rId2"/>
+          <a:blip r:embed="rId1"/>
           <a:stretch>
             <a:fillRect/>
           </a:stretch>
@@ -14657,20 +14161,14 @@
       </p:pic>
       <p:pic>
         <p:nvPicPr>
-          <p:cNvPr id="5" name="Picture 4">
-            <a:extLst>
-              <a:ext uri="{FF2B5EF4-FFF2-40B4-BE49-F238E27FC236}">
-                <a16:creationId xmlns:a16="http://schemas.microsoft.com/office/drawing/2014/main" id="{5E0658B9-834B-0F7B-13D6-CA7FC2EAAA14}"/>
-              </a:ext>
-            </a:extLst>
-          </p:cNvPr>
+          <p:cNvPr id="5" name="Picture 4"/>
           <p:cNvPicPr>
             <a:picLocks noChangeAspect="1"/>
           </p:cNvPicPr>
           <p:nvPr/>
         </p:nvPicPr>
         <p:blipFill>
-          <a:blip r:embed="rId3"/>
+          <a:blip r:embed="rId2"/>
           <a:stretch>
             <a:fillRect/>
           </a:stretch>
@@ -14687,20 +14185,14 @@
       </p:pic>
       <p:pic>
         <p:nvPicPr>
-          <p:cNvPr id="6" name="Picture 2">
-            <a:extLst>
-              <a:ext uri="{FF2B5EF4-FFF2-40B4-BE49-F238E27FC236}">
-                <a16:creationId xmlns:a16="http://schemas.microsoft.com/office/drawing/2014/main" id="{3C15DF77-16B4-D0A2-850B-AE43E2B98EAF}"/>
-              </a:ext>
-            </a:extLst>
-          </p:cNvPr>
+          <p:cNvPr id="6" name="Picture 2"/>
           <p:cNvPicPr>
             <a:picLocks noChangeAspect="1" noChangeArrowheads="1"/>
           </p:cNvPicPr>
           <p:nvPr/>
         </p:nvPicPr>
         <p:blipFill>
-          <a:blip r:embed="rId4"/>
+          <a:blip r:embed="rId3"/>
           <a:srcRect/>
           <a:stretch>
             <a:fillRect/>
@@ -14725,11 +14217,6 @@
         </p:spPr>
       </p:pic>
     </p:spTree>
-    <p:extLst>
-      <p:ext uri="{BB962C8B-B14F-4D97-AF65-F5344CB8AC3E}">
-        <p14:creationId xmlns:p14="http://schemas.microsoft.com/office/powerpoint/2010/main" val="886528035"/>
-      </p:ext>
-    </p:extLst>
   </p:cSld>
   <p:clrMapOvr>
     <a:masterClrMapping/>
@@ -14773,6 +14260,7 @@
               <a:rPr lang="en-US" dirty="0"/>
               <a:t>A* Search with example</a:t>
             </a:r>
+            <a:endParaRPr lang="en-US" dirty="0"/>
           </a:p>
         </p:txBody>
       </p:sp>
@@ -14804,6 +14292,9 @@
               </a:rPr>
               <a:t>Shortest path found in 4 moves, and we didn’t check every single cell blindly — the heuristic guided us toward the goal.</a:t>
             </a:r>
+            <a:endParaRPr lang="en-US" sz="1600" b="1" dirty="0">
+              <a:latin typeface="+mj-lt"/>
+            </a:endParaRPr>
           </a:p>
         </p:txBody>
       </p:sp>
@@ -14816,7 +14307,7 @@
           <p:nvPr/>
         </p:nvPicPr>
         <p:blipFill>
-          <a:blip r:embed="rId2"/>
+          <a:blip r:embed="rId1"/>
           <a:stretch>
             <a:fillRect/>
           </a:stretch>
@@ -14832,11 +14323,6 @@
         </p:spPr>
       </p:pic>
     </p:spTree>
-    <p:extLst>
-      <p:ext uri="{BB962C8B-B14F-4D97-AF65-F5344CB8AC3E}">
-        <p14:creationId xmlns:p14="http://schemas.microsoft.com/office/powerpoint/2010/main" val="2360171783"/>
-      </p:ext>
-    </p:extLst>
   </p:cSld>
   <p:clrMapOvr>
     <a:masterClrMapping/>
@@ -14849,13 +14335,7 @@
   <p:cSld>
     <p:spTree>
       <p:nvGrpSpPr>
-        <p:cNvPr id="1" name="">
-          <a:extLst>
-            <a:ext uri="{FF2B5EF4-FFF2-40B4-BE49-F238E27FC236}">
-              <a16:creationId xmlns:a16="http://schemas.microsoft.com/office/drawing/2014/main" id="{153A35E3-825C-30D7-8F5A-D9DB071CB013}"/>
-            </a:ext>
-          </a:extLst>
-        </p:cNvPr>
+        <p:cNvPr id="1" name=""/>
         <p:cNvGrpSpPr/>
         <p:nvPr/>
       </p:nvGrpSpPr>
@@ -14869,13 +14349,7 @@
       </p:grpSpPr>
       <p:sp>
         <p:nvSpPr>
-          <p:cNvPr id="2" name="Title 1">
-            <a:extLst>
-              <a:ext uri="{FF2B5EF4-FFF2-40B4-BE49-F238E27FC236}">
-                <a16:creationId xmlns:a16="http://schemas.microsoft.com/office/drawing/2014/main" id="{6B7C17C8-DD8E-85BC-C7DF-F703066527C9}"/>
-              </a:ext>
-            </a:extLst>
-          </p:cNvPr>
+          <p:cNvPr id="2" name="Title 1"/>
           <p:cNvSpPr>
             <a:spLocks noGrp="1"/>
           </p:cNvSpPr>
@@ -14897,18 +14371,13 @@
               <a:rPr lang="en-US" dirty="0"/>
               <a:t>Formal Definition &amp; Core Concept</a:t>
             </a:r>
+            <a:endParaRPr lang="en-US" dirty="0"/>
           </a:p>
         </p:txBody>
       </p:sp>
       <p:sp>
         <p:nvSpPr>
-          <p:cNvPr id="3" name="Text Placeholder 2">
-            <a:extLst>
-              <a:ext uri="{FF2B5EF4-FFF2-40B4-BE49-F238E27FC236}">
-                <a16:creationId xmlns:a16="http://schemas.microsoft.com/office/drawing/2014/main" id="{36537FE6-A8AE-DC29-7675-3C3799880CB0}"/>
-              </a:ext>
-            </a:extLst>
-          </p:cNvPr>
+          <p:cNvPr id="3" name="Text Placeholder 2"/>
           <p:cNvSpPr>
             <a:spLocks noGrp="1"/>
           </p:cNvSpPr>
@@ -14927,20 +14396,14 @@
       </p:sp>
       <p:pic>
         <p:nvPicPr>
-          <p:cNvPr id="6" name="Picture 5">
-            <a:extLst>
-              <a:ext uri="{FF2B5EF4-FFF2-40B4-BE49-F238E27FC236}">
-                <a16:creationId xmlns:a16="http://schemas.microsoft.com/office/drawing/2014/main" id="{2FEF7B1E-1F58-472C-82C1-350E7D22D429}"/>
-              </a:ext>
-            </a:extLst>
-          </p:cNvPr>
+          <p:cNvPr id="6" name="Picture 5"/>
           <p:cNvPicPr>
             <a:picLocks noChangeAspect="1"/>
           </p:cNvPicPr>
           <p:nvPr/>
         </p:nvPicPr>
         <p:blipFill>
-          <a:blip r:embed="rId2"/>
+          <a:blip r:embed="rId1"/>
           <a:stretch>
             <a:fillRect/>
           </a:stretch>
@@ -14956,11 +14419,6 @@
         </p:spPr>
       </p:pic>
     </p:spTree>
-    <p:extLst>
-      <p:ext uri="{BB962C8B-B14F-4D97-AF65-F5344CB8AC3E}">
-        <p14:creationId xmlns:p14="http://schemas.microsoft.com/office/powerpoint/2010/main" val="624572018"/>
-      </p:ext>
-    </p:extLst>
   </p:cSld>
   <p:clrMapOvr>
     <a:masterClrMapping/>
@@ -14987,13 +14445,7 @@
       </p:grpSpPr>
       <p:sp>
         <p:nvSpPr>
-          <p:cNvPr id="2" name="Title 1">
-            <a:extLst>
-              <a:ext uri="{FF2B5EF4-FFF2-40B4-BE49-F238E27FC236}">
-                <a16:creationId xmlns:a16="http://schemas.microsoft.com/office/drawing/2014/main" id="{47092681-DC6D-8D42-6343-3E0A05051797}"/>
-              </a:ext>
-            </a:extLst>
-          </p:cNvPr>
+          <p:cNvPr id="2" name="Title 1"/>
           <p:cNvSpPr>
             <a:spLocks noGrp="1"/>
           </p:cNvSpPr>
@@ -15017,18 +14469,13 @@
               <a:rPr lang="en-US" dirty="0"/>
               <a:t>Mathematical Example – The Knapsack Problem</a:t>
             </a:r>
+            <a:endParaRPr lang="en-US" dirty="0"/>
           </a:p>
         </p:txBody>
       </p:sp>
       <p:sp>
         <p:nvSpPr>
-          <p:cNvPr id="3" name="Text Placeholder 2">
-            <a:extLst>
-              <a:ext uri="{FF2B5EF4-FFF2-40B4-BE49-F238E27FC236}">
-                <a16:creationId xmlns:a16="http://schemas.microsoft.com/office/drawing/2014/main" id="{AE8FA5AE-4D12-6956-4CB0-512548561C64}"/>
-              </a:ext>
-            </a:extLst>
-          </p:cNvPr>
+          <p:cNvPr id="3" name="Text Placeholder 2"/>
           <p:cNvSpPr>
             <a:spLocks noGrp="1"/>
           </p:cNvSpPr>
@@ -15047,20 +14494,14 @@
       </p:sp>
       <p:pic>
         <p:nvPicPr>
-          <p:cNvPr id="5" name="Picture 4">
-            <a:extLst>
-              <a:ext uri="{FF2B5EF4-FFF2-40B4-BE49-F238E27FC236}">
-                <a16:creationId xmlns:a16="http://schemas.microsoft.com/office/drawing/2014/main" id="{1CDB809B-73A0-6A65-F726-82DE200825FE}"/>
-              </a:ext>
-            </a:extLst>
-          </p:cNvPr>
+          <p:cNvPr id="5" name="Picture 4"/>
           <p:cNvPicPr>
             <a:picLocks noChangeAspect="1"/>
           </p:cNvPicPr>
           <p:nvPr/>
         </p:nvPicPr>
         <p:blipFill>
-          <a:blip r:embed="rId2"/>
+          <a:blip r:embed="rId1"/>
           <a:stretch>
             <a:fillRect/>
           </a:stretch>
@@ -15077,20 +14518,14 @@
       </p:pic>
       <p:pic>
         <p:nvPicPr>
-          <p:cNvPr id="7" name="Picture 6">
-            <a:extLst>
-              <a:ext uri="{FF2B5EF4-FFF2-40B4-BE49-F238E27FC236}">
-                <a16:creationId xmlns:a16="http://schemas.microsoft.com/office/drawing/2014/main" id="{714E8502-2EB4-8D87-D149-B00DD475F022}"/>
-              </a:ext>
-            </a:extLst>
-          </p:cNvPr>
+          <p:cNvPr id="7" name="Picture 6"/>
           <p:cNvPicPr>
             <a:picLocks noChangeAspect="1"/>
           </p:cNvPicPr>
           <p:nvPr/>
         </p:nvPicPr>
         <p:blipFill>
-          <a:blip r:embed="rId3"/>
+          <a:blip r:embed="rId2"/>
           <a:stretch>
             <a:fillRect/>
           </a:stretch>
@@ -15106,11 +14541,6 @@
         </p:spPr>
       </p:pic>
     </p:spTree>
-    <p:extLst>
-      <p:ext uri="{BB962C8B-B14F-4D97-AF65-F5344CB8AC3E}">
-        <p14:creationId xmlns:p14="http://schemas.microsoft.com/office/powerpoint/2010/main" val="2450563182"/>
-      </p:ext>
-    </p:extLst>
   </p:cSld>
   <p:clrMapOvr>
     <a:masterClrMapping/>
@@ -15123,13 +14553,7 @@
   <p:cSld>
     <p:spTree>
       <p:nvGrpSpPr>
-        <p:cNvPr id="1" name="">
-          <a:extLst>
-            <a:ext uri="{FF2B5EF4-FFF2-40B4-BE49-F238E27FC236}">
-              <a16:creationId xmlns:a16="http://schemas.microsoft.com/office/drawing/2014/main" id="{C85C1CE5-AC95-D23A-61B6-C2988FE10B60}"/>
-            </a:ext>
-          </a:extLst>
-        </p:cNvPr>
+        <p:cNvPr id="1" name=""/>
         <p:cNvGrpSpPr/>
         <p:nvPr/>
       </p:nvGrpSpPr>
@@ -15143,13 +14567,7 @@
       </p:grpSpPr>
       <p:sp>
         <p:nvSpPr>
-          <p:cNvPr id="2" name="Title 1">
-            <a:extLst>
-              <a:ext uri="{FF2B5EF4-FFF2-40B4-BE49-F238E27FC236}">
-                <a16:creationId xmlns:a16="http://schemas.microsoft.com/office/drawing/2014/main" id="{14D4F482-D9C7-A817-5594-2E046F1EFC72}"/>
-              </a:ext>
-            </a:extLst>
-          </p:cNvPr>
+          <p:cNvPr id="2" name="Title 1"/>
           <p:cNvSpPr>
             <a:spLocks noGrp="1"/>
           </p:cNvSpPr>
@@ -15173,18 +14591,13 @@
               <a:rPr lang="en-US" dirty="0"/>
               <a:t>Mathematical Example – The Knapsack Problem</a:t>
             </a:r>
+            <a:endParaRPr lang="en-US" dirty="0"/>
           </a:p>
         </p:txBody>
       </p:sp>
       <p:sp>
         <p:nvSpPr>
-          <p:cNvPr id="3" name="Text Placeholder 2">
-            <a:extLst>
-              <a:ext uri="{FF2B5EF4-FFF2-40B4-BE49-F238E27FC236}">
-                <a16:creationId xmlns:a16="http://schemas.microsoft.com/office/drawing/2014/main" id="{ECB73991-CC3E-5DB0-10F9-4F581693E104}"/>
-              </a:ext>
-            </a:extLst>
-          </p:cNvPr>
+          <p:cNvPr id="3" name="Text Placeholder 2"/>
           <p:cNvSpPr>
             <a:spLocks noGrp="1"/>
           </p:cNvSpPr>
@@ -15203,20 +14616,14 @@
       </p:sp>
       <p:pic>
         <p:nvPicPr>
-          <p:cNvPr id="6" name="Picture 5">
-            <a:extLst>
-              <a:ext uri="{FF2B5EF4-FFF2-40B4-BE49-F238E27FC236}">
-                <a16:creationId xmlns:a16="http://schemas.microsoft.com/office/drawing/2014/main" id="{3BBA5F7B-3AAA-05AA-8FBB-F5CE3F9142F1}"/>
-              </a:ext>
-            </a:extLst>
-          </p:cNvPr>
+          <p:cNvPr id="6" name="Picture 5"/>
           <p:cNvPicPr>
             <a:picLocks noChangeAspect="1"/>
           </p:cNvPicPr>
           <p:nvPr/>
         </p:nvPicPr>
         <p:blipFill>
-          <a:blip r:embed="rId2"/>
+          <a:blip r:embed="rId1"/>
           <a:stretch>
             <a:fillRect/>
           </a:stretch>
@@ -15232,11 +14639,6 @@
         </p:spPr>
       </p:pic>
     </p:spTree>
-    <p:extLst>
-      <p:ext uri="{BB962C8B-B14F-4D97-AF65-F5344CB8AC3E}">
-        <p14:creationId xmlns:p14="http://schemas.microsoft.com/office/powerpoint/2010/main" val="1336228495"/>
-      </p:ext>
-    </p:extLst>
   </p:cSld>
   <p:clrMapOvr>
     <a:masterClrMapping/>
@@ -15263,13 +14665,7 @@
       </p:grpSpPr>
       <p:sp>
         <p:nvSpPr>
-          <p:cNvPr id="2" name="Title 1">
-            <a:extLst>
-              <a:ext uri="{FF2B5EF4-FFF2-40B4-BE49-F238E27FC236}">
-                <a16:creationId xmlns:a16="http://schemas.microsoft.com/office/drawing/2014/main" id="{010858E1-4529-7AF1-A709-B060AA3C741A}"/>
-              </a:ext>
-            </a:extLst>
-          </p:cNvPr>
+          <p:cNvPr id="2" name="Title 1"/>
           <p:cNvSpPr>
             <a:spLocks noGrp="1"/>
           </p:cNvSpPr>
@@ -15293,18 +14689,13 @@
               <a:rPr lang="en-US" dirty="0"/>
               <a:t>Heuristic vs. Exact Algorithms</a:t>
             </a:r>
+            <a:endParaRPr lang="en-US" dirty="0"/>
           </a:p>
         </p:txBody>
       </p:sp>
       <p:sp>
         <p:nvSpPr>
-          <p:cNvPr id="3" name="Text Placeholder 2">
-            <a:extLst>
-              <a:ext uri="{FF2B5EF4-FFF2-40B4-BE49-F238E27FC236}">
-                <a16:creationId xmlns:a16="http://schemas.microsoft.com/office/drawing/2014/main" id="{60254601-E83F-3934-D84D-E6AF61B5E631}"/>
-              </a:ext>
-            </a:extLst>
-          </p:cNvPr>
+          <p:cNvPr id="3" name="Text Placeholder 2"/>
           <p:cNvSpPr>
             <a:spLocks noGrp="1"/>
           </p:cNvSpPr>
@@ -15323,20 +14714,14 @@
       </p:sp>
       <p:pic>
         <p:nvPicPr>
-          <p:cNvPr id="5" name="Picture 4">
-            <a:extLst>
-              <a:ext uri="{FF2B5EF4-FFF2-40B4-BE49-F238E27FC236}">
-                <a16:creationId xmlns:a16="http://schemas.microsoft.com/office/drawing/2014/main" id="{11AD934A-37EB-59C0-E130-43BFA5525B6E}"/>
-              </a:ext>
-            </a:extLst>
-          </p:cNvPr>
+          <p:cNvPr id="5" name="Picture 4"/>
           <p:cNvPicPr>
             <a:picLocks noChangeAspect="1"/>
           </p:cNvPicPr>
           <p:nvPr/>
         </p:nvPicPr>
         <p:blipFill>
-          <a:blip r:embed="rId2"/>
+          <a:blip r:embed="rId1"/>
           <a:stretch>
             <a:fillRect/>
           </a:stretch>
@@ -15352,11 +14737,6 @@
         </p:spPr>
       </p:pic>
     </p:spTree>
-    <p:extLst>
-      <p:ext uri="{BB962C8B-B14F-4D97-AF65-F5344CB8AC3E}">
-        <p14:creationId xmlns:p14="http://schemas.microsoft.com/office/powerpoint/2010/main" val="1105624085"/>
-      </p:ext>
-    </p:extLst>
   </p:cSld>
   <p:clrMapOvr>
     <a:masterClrMapping/>
@@ -15383,13 +14763,7 @@
       </p:grpSpPr>
       <p:sp>
         <p:nvSpPr>
-          <p:cNvPr id="2" name="Title 1">
-            <a:extLst>
-              <a:ext uri="{FF2B5EF4-FFF2-40B4-BE49-F238E27FC236}">
-                <a16:creationId xmlns:a16="http://schemas.microsoft.com/office/drawing/2014/main" id="{408510C8-24F6-D1BA-CBCC-04C99BB55639}"/>
-              </a:ext>
-            </a:extLst>
-          </p:cNvPr>
+          <p:cNvPr id="2" name="Title 1"/>
           <p:cNvSpPr>
             <a:spLocks noGrp="1"/>
           </p:cNvSpPr>
@@ -15406,18 +14780,13 @@
               <a:rPr lang="en-US" dirty="0"/>
               <a:t>Real-World Applications</a:t>
             </a:r>
+            <a:endParaRPr lang="en-US" dirty="0"/>
           </a:p>
         </p:txBody>
       </p:sp>
       <p:sp>
         <p:nvSpPr>
-          <p:cNvPr id="3" name="Text Placeholder 2">
-            <a:extLst>
-              <a:ext uri="{FF2B5EF4-FFF2-40B4-BE49-F238E27FC236}">
-                <a16:creationId xmlns:a16="http://schemas.microsoft.com/office/drawing/2014/main" id="{4BBB1579-7CD4-C42B-1C42-D9BD2CF62C54}"/>
-              </a:ext>
-            </a:extLst>
-          </p:cNvPr>
+          <p:cNvPr id="3" name="Text Placeholder 2"/>
           <p:cNvSpPr>
             <a:spLocks noGrp="1"/>
           </p:cNvSpPr>
@@ -15436,20 +14805,14 @@
       </p:sp>
       <p:pic>
         <p:nvPicPr>
-          <p:cNvPr id="5" name="Picture 4">
-            <a:extLst>
-              <a:ext uri="{FF2B5EF4-FFF2-40B4-BE49-F238E27FC236}">
-                <a16:creationId xmlns:a16="http://schemas.microsoft.com/office/drawing/2014/main" id="{D93361FF-F578-2777-26C1-7F1AEE5E5E35}"/>
-              </a:ext>
-            </a:extLst>
-          </p:cNvPr>
+          <p:cNvPr id="5" name="Picture 4"/>
           <p:cNvPicPr>
             <a:picLocks noChangeAspect="1"/>
           </p:cNvPicPr>
           <p:nvPr/>
         </p:nvPicPr>
         <p:blipFill>
-          <a:blip r:embed="rId2"/>
+          <a:blip r:embed="rId1"/>
           <a:stretch>
             <a:fillRect/>
           </a:stretch>
@@ -15465,11 +14828,6 @@
         </p:spPr>
       </p:pic>
     </p:spTree>
-    <p:extLst>
-      <p:ext uri="{BB962C8B-B14F-4D97-AF65-F5344CB8AC3E}">
-        <p14:creationId xmlns:p14="http://schemas.microsoft.com/office/powerpoint/2010/main" val="1972742275"/>
-      </p:ext>
-    </p:extLst>
   </p:cSld>
   <p:clrMapOvr>
     <a:masterClrMapping/>
@@ -15496,13 +14854,7 @@
       </p:grpSpPr>
       <p:sp>
         <p:nvSpPr>
-          <p:cNvPr id="2" name="Title 1">
-            <a:extLst>
-              <a:ext uri="{FF2B5EF4-FFF2-40B4-BE49-F238E27FC236}">
-                <a16:creationId xmlns:a16="http://schemas.microsoft.com/office/drawing/2014/main" id="{45566AB6-70A3-1356-B60B-04498A52121A}"/>
-              </a:ext>
-            </a:extLst>
-          </p:cNvPr>
+          <p:cNvPr id="2" name="Title 1"/>
           <p:cNvSpPr>
             <a:spLocks noGrp="1"/>
           </p:cNvSpPr>
@@ -15519,18 +14871,13 @@
               <a:rPr lang="en-US" dirty="0"/>
               <a:t>Summary &amp; Takeaways</a:t>
             </a:r>
+            <a:endParaRPr lang="en-US" dirty="0"/>
           </a:p>
         </p:txBody>
       </p:sp>
       <p:sp>
         <p:nvSpPr>
-          <p:cNvPr id="3" name="Text Placeholder 2">
-            <a:extLst>
-              <a:ext uri="{FF2B5EF4-FFF2-40B4-BE49-F238E27FC236}">
-                <a16:creationId xmlns:a16="http://schemas.microsoft.com/office/drawing/2014/main" id="{90D8AFAE-221D-F61D-8C0E-3E8EBCE0FCAA}"/>
-              </a:ext>
-            </a:extLst>
-          </p:cNvPr>
+          <p:cNvPr id="3" name="Text Placeholder 2"/>
           <p:cNvSpPr>
             <a:spLocks noGrp="1"/>
           </p:cNvSpPr>
@@ -15558,25 +14905,24 @@
               </a:rPr>
               <a:t>"Fast and good enough is usually better than perfect and infinite."</a:t>
             </a:r>
+            <a:endParaRPr lang="en-US" sz="3200" dirty="0">
+              <a:solidFill>
+                <a:srgbClr val="FF0000"/>
+              </a:solidFill>
+            </a:endParaRPr>
           </a:p>
         </p:txBody>
       </p:sp>
       <p:pic>
         <p:nvPicPr>
-          <p:cNvPr id="7" name="Picture 6">
-            <a:extLst>
-              <a:ext uri="{FF2B5EF4-FFF2-40B4-BE49-F238E27FC236}">
-                <a16:creationId xmlns:a16="http://schemas.microsoft.com/office/drawing/2014/main" id="{C04DB7C6-643C-0BB0-DE68-45541027BB2C}"/>
-              </a:ext>
-            </a:extLst>
-          </p:cNvPr>
+          <p:cNvPr id="7" name="Picture 6"/>
           <p:cNvPicPr>
             <a:picLocks noChangeAspect="1"/>
           </p:cNvPicPr>
           <p:nvPr/>
         </p:nvPicPr>
         <p:blipFill>
-          <a:blip r:embed="rId2"/>
+          <a:blip r:embed="rId1"/>
           <a:stretch>
             <a:fillRect/>
           </a:stretch>
@@ -15592,11 +14938,6 @@
         </p:spPr>
       </p:pic>
     </p:spTree>
-    <p:extLst>
-      <p:ext uri="{BB962C8B-B14F-4D97-AF65-F5344CB8AC3E}">
-        <p14:creationId xmlns:p14="http://schemas.microsoft.com/office/powerpoint/2010/main" val="2284149288"/>
-      </p:ext>
-    </p:extLst>
   </p:cSld>
   <p:clrMapOvr>
     <a:masterClrMapping/>
@@ -15640,6 +14981,7 @@
               <a:rPr lang="en-US" dirty="0"/>
               <a:t>Heuristic Algorithm With Real Example</a:t>
             </a:r>
+            <a:endParaRPr lang="en-US" dirty="0"/>
           </a:p>
         </p:txBody>
       </p:sp>
@@ -15671,7 +15013,7 @@
           <p:nvPr/>
         </p:nvPicPr>
         <p:blipFill>
-          <a:blip r:embed="rId2"/>
+          <a:blip r:embed="rId1"/>
           <a:stretch>
             <a:fillRect/>
           </a:stretch>
@@ -15687,11 +15029,6 @@
         </p:spPr>
       </p:pic>
     </p:spTree>
-    <p:extLst>
-      <p:ext uri="{BB962C8B-B14F-4D97-AF65-F5344CB8AC3E}">
-        <p14:creationId xmlns:p14="http://schemas.microsoft.com/office/powerpoint/2010/main" val="1525508537"/>
-      </p:ext>
-    </p:extLst>
   </p:cSld>
   <p:clrMapOvr>
     <a:masterClrMapping/>
@@ -15975,8 +15312,11 @@
       </a:bgFillStyleLst>
     </a:fmtScheme>
   </a:themeElements>
-  <a:objectDefaults/>
-  <a:extraClrSchemeLst/>
+  <a:extLst>
+    <a:ext uri="{05A4C25C-085E-4340-85A3-A5531E510DB2}">
+      <thm15:themeFamily xmlns:thm15="http://schemas.microsoft.com/office/thememl/2012/main" name="Office Theme" id="{62F939B6-93AF-4DB8-9C6B-D6C7DFDC589F}" vid="{4A3C46E8-61CC-4603-A589-7422A47A8E4A}"/>
+    </a:ext>
+  </a:extLst>
 </a:theme>
 </file>
 
@@ -16256,7 +15596,10 @@
       </a:bgFillStyleLst>
     </a:fmtScheme>
   </a:themeElements>
-  <a:objectDefaults/>
-  <a:extraClrSchemeLst/>
+  <a:extLst>
+    <a:ext uri="{05A4C25C-085E-4340-85A3-A5531E510DB2}">
+      <thm15:themeFamily xmlns:thm15="http://schemas.microsoft.com/office/thememl/2012/main" name="Office Theme" id="{62F939B6-93AF-4DB8-9C6B-D6C7DFDC589F}" vid="{4A3C46E8-61CC-4603-A589-7422A47A8E4A}"/>
+    </a:ext>
+  </a:extLst>
 </a:theme>
 </file>